--- a/我在這裡敬拜.pptx
+++ b/我在這裡敬拜.pptx
@@ -5,12 +5,14 @@
     <p:sldMasterId id="2147483660" r:id="rId1"/>
   </p:sldMasterIdLst>
   <p:sldIdLst>
-    <p:sldId id="257" r:id="rId2"/>
-    <p:sldId id="258" r:id="rId3"/>
-    <p:sldId id="259" r:id="rId4"/>
-    <p:sldId id="260" r:id="rId5"/>
-    <p:sldId id="261" r:id="rId6"/>
-    <p:sldId id="262" r:id="rId7"/>
+    <p:sldId id="391" r:id="rId2"/>
+    <p:sldId id="392" r:id="rId3"/>
+    <p:sldId id="393" r:id="rId4"/>
+    <p:sldId id="394" r:id="rId5"/>
+    <p:sldId id="395" r:id="rId6"/>
+    <p:sldId id="396" r:id="rId7"/>
+    <p:sldId id="397" r:id="rId8"/>
+    <p:sldId id="398" r:id="rId9"/>
   </p:sldIdLst>
   <p:sldSz cx="9144000" cy="5143500" type="screen16x9"/>
   <p:notesSz cx="6858000" cy="9144000"/>
@@ -109,6 +111,22 @@
       </a:defRPr>
     </a:lvl9pPr>
   </p:defaultTextStyle>
+  <p:extLst>
+    <p:ext uri="{EFAFB233-063F-42B5-8137-9DF3F51BA10A}">
+      <p15:sldGuideLst xmlns:p15="http://schemas.microsoft.com/office/powerpoint/2012/main">
+        <p15:guide id="1" orient="horz" pos="1620">
+          <p15:clr>
+            <a:srgbClr val="A4A3A4"/>
+          </p15:clr>
+        </p15:guide>
+        <p15:guide id="2" pos="2880">
+          <p15:clr>
+            <a:srgbClr val="A4A3A4"/>
+          </p15:clr>
+        </p15:guide>
+      </p15:sldGuideLst>
+    </p:ext>
+  </p:extLst>
 </p:presentation>
 </file>
 
@@ -150,7 +168,7 @@
           <a:lstStyle/>
           <a:p>
             <a:r>
-              <a:rPr lang="en-US" altLang="zh-TW" smtClean="0"/>
+              <a:rPr lang="en-US" altLang="zh-TW"/>
               <a:t>Click to edit Master title style</a:t>
             </a:r>
             <a:endParaRPr lang="zh-TW" altLang="en-US"/>
@@ -269,7 +287,7 @@
           </a:lstStyle>
           <a:p>
             <a:r>
-              <a:rPr lang="en-US" altLang="zh-TW" smtClean="0"/>
+              <a:rPr lang="en-US" altLang="zh-TW"/>
               <a:t>Click to edit Master subtitle style</a:t>
             </a:r>
             <a:endParaRPr lang="zh-TW" altLang="en-US"/>
@@ -293,7 +311,7 @@
           <a:p>
             <a:fld id="{11ECD596-81E3-4803-8919-6962D4E4C98D}" type="datetimeFigureOut">
               <a:rPr lang="en-US" smtClean="0"/>
-              <a:t>9/13/2019</a:t>
+              <a:t>8/24/2025</a:t>
             </a:fld>
             <a:endParaRPr lang="en-US"/>
           </a:p>
@@ -382,7 +400,7 @@
           <a:lstStyle/>
           <a:p>
             <a:r>
-              <a:rPr lang="en-US" altLang="zh-TW" smtClean="0"/>
+              <a:rPr lang="en-US" altLang="zh-TW"/>
               <a:t>Click to edit Master title style</a:t>
             </a:r>
             <a:endParaRPr lang="zh-TW" altLang="en-US"/>
@@ -406,35 +424,35 @@
           <a:p>
             <a:pPr lvl="0"/>
             <a:r>
-              <a:rPr lang="en-US" altLang="zh-TW" smtClean="0"/>
+              <a:rPr lang="en-US" altLang="zh-TW"/>
               <a:t>Click to edit Master text styles</a:t>
             </a:r>
           </a:p>
           <a:p>
             <a:pPr lvl="1"/>
             <a:r>
-              <a:rPr lang="en-US" altLang="zh-TW" smtClean="0"/>
+              <a:rPr lang="en-US" altLang="zh-TW"/>
               <a:t>Second level</a:t>
             </a:r>
           </a:p>
           <a:p>
             <a:pPr lvl="2"/>
             <a:r>
-              <a:rPr lang="en-US" altLang="zh-TW" smtClean="0"/>
+              <a:rPr lang="en-US" altLang="zh-TW"/>
               <a:t>Third level</a:t>
             </a:r>
           </a:p>
           <a:p>
             <a:pPr lvl="3"/>
             <a:r>
-              <a:rPr lang="en-US" altLang="zh-TW" smtClean="0"/>
+              <a:rPr lang="en-US" altLang="zh-TW"/>
               <a:t>Fourth level</a:t>
             </a:r>
           </a:p>
           <a:p>
             <a:pPr lvl="4"/>
             <a:r>
-              <a:rPr lang="en-US" altLang="zh-TW" smtClean="0"/>
+              <a:rPr lang="en-US" altLang="zh-TW"/>
               <a:t>Fifth level</a:t>
             </a:r>
             <a:endParaRPr lang="zh-TW" altLang="en-US"/>
@@ -458,7 +476,7 @@
           <a:p>
             <a:fld id="{11ECD596-81E3-4803-8919-6962D4E4C98D}" type="datetimeFigureOut">
               <a:rPr lang="en-US" smtClean="0"/>
-              <a:t>9/13/2019</a:t>
+              <a:t>8/24/2025</a:t>
             </a:fld>
             <a:endParaRPr lang="en-US"/>
           </a:p>
@@ -552,7 +570,7 @@
           <a:lstStyle/>
           <a:p>
             <a:r>
-              <a:rPr lang="en-US" altLang="zh-TW" smtClean="0"/>
+              <a:rPr lang="en-US" altLang="zh-TW"/>
               <a:t>Click to edit Master title style</a:t>
             </a:r>
             <a:endParaRPr lang="zh-TW" altLang="en-US"/>
@@ -581,35 +599,35 @@
           <a:p>
             <a:pPr lvl="0"/>
             <a:r>
-              <a:rPr lang="en-US" altLang="zh-TW" smtClean="0"/>
+              <a:rPr lang="en-US" altLang="zh-TW"/>
               <a:t>Click to edit Master text styles</a:t>
             </a:r>
           </a:p>
           <a:p>
             <a:pPr lvl="1"/>
             <a:r>
-              <a:rPr lang="en-US" altLang="zh-TW" smtClean="0"/>
+              <a:rPr lang="en-US" altLang="zh-TW"/>
               <a:t>Second level</a:t>
             </a:r>
           </a:p>
           <a:p>
             <a:pPr lvl="2"/>
             <a:r>
-              <a:rPr lang="en-US" altLang="zh-TW" smtClean="0"/>
+              <a:rPr lang="en-US" altLang="zh-TW"/>
               <a:t>Third level</a:t>
             </a:r>
           </a:p>
           <a:p>
             <a:pPr lvl="3"/>
             <a:r>
-              <a:rPr lang="en-US" altLang="zh-TW" smtClean="0"/>
+              <a:rPr lang="en-US" altLang="zh-TW"/>
               <a:t>Fourth level</a:t>
             </a:r>
           </a:p>
           <a:p>
             <a:pPr lvl="4"/>
             <a:r>
-              <a:rPr lang="en-US" altLang="zh-TW" smtClean="0"/>
+              <a:rPr lang="en-US" altLang="zh-TW"/>
               <a:t>Fifth level</a:t>
             </a:r>
             <a:endParaRPr lang="zh-TW" altLang="en-US"/>
@@ -633,7 +651,7 @@
           <a:p>
             <a:fld id="{11ECD596-81E3-4803-8919-6962D4E4C98D}" type="datetimeFigureOut">
               <a:rPr lang="en-US" smtClean="0"/>
-              <a:t>9/13/2019</a:t>
+              <a:t>8/24/2025</a:t>
             </a:fld>
             <a:endParaRPr lang="en-US"/>
           </a:p>
@@ -722,7 +740,7 @@
           <a:lstStyle/>
           <a:p>
             <a:r>
-              <a:rPr lang="en-US" altLang="zh-TW" smtClean="0"/>
+              <a:rPr lang="en-US" altLang="zh-TW"/>
               <a:t>Click to edit Master title style</a:t>
             </a:r>
             <a:endParaRPr lang="zh-TW" altLang="en-US"/>
@@ -746,35 +764,35 @@
           <a:p>
             <a:pPr lvl="0"/>
             <a:r>
-              <a:rPr lang="en-US" altLang="zh-TW" smtClean="0"/>
+              <a:rPr lang="en-US" altLang="zh-TW"/>
               <a:t>Click to edit Master text styles</a:t>
             </a:r>
           </a:p>
           <a:p>
             <a:pPr lvl="1"/>
             <a:r>
-              <a:rPr lang="en-US" altLang="zh-TW" smtClean="0"/>
+              <a:rPr lang="en-US" altLang="zh-TW"/>
               <a:t>Second level</a:t>
             </a:r>
           </a:p>
           <a:p>
             <a:pPr lvl="2"/>
             <a:r>
-              <a:rPr lang="en-US" altLang="zh-TW" smtClean="0"/>
+              <a:rPr lang="en-US" altLang="zh-TW"/>
               <a:t>Third level</a:t>
             </a:r>
           </a:p>
           <a:p>
             <a:pPr lvl="3"/>
             <a:r>
-              <a:rPr lang="en-US" altLang="zh-TW" smtClean="0"/>
+              <a:rPr lang="en-US" altLang="zh-TW"/>
               <a:t>Fourth level</a:t>
             </a:r>
           </a:p>
           <a:p>
             <a:pPr lvl="4"/>
             <a:r>
-              <a:rPr lang="en-US" altLang="zh-TW" smtClean="0"/>
+              <a:rPr lang="en-US" altLang="zh-TW"/>
               <a:t>Fifth level</a:t>
             </a:r>
             <a:endParaRPr lang="zh-TW" altLang="en-US"/>
@@ -798,7 +816,7 @@
           <a:p>
             <a:fld id="{11ECD596-81E3-4803-8919-6962D4E4C98D}" type="datetimeFigureOut">
               <a:rPr lang="en-US" smtClean="0"/>
-              <a:t>9/13/2019</a:t>
+              <a:t>8/24/2025</a:t>
             </a:fld>
             <a:endParaRPr lang="en-US"/>
           </a:p>
@@ -896,7 +914,7 @@
           </a:lstStyle>
           <a:p>
             <a:r>
-              <a:rPr lang="en-US" altLang="zh-TW" smtClean="0"/>
+              <a:rPr lang="en-US" altLang="zh-TW"/>
               <a:t>Click to edit Master title style</a:t>
             </a:r>
             <a:endParaRPr lang="zh-TW" altLang="en-US"/>
@@ -1016,7 +1034,7 @@
           <a:p>
             <a:pPr lvl="0"/>
             <a:r>
-              <a:rPr lang="en-US" altLang="zh-TW" smtClean="0"/>
+              <a:rPr lang="en-US" altLang="zh-TW"/>
               <a:t>Click to edit Master text styles</a:t>
             </a:r>
           </a:p>
@@ -1039,7 +1057,7 @@
           <a:p>
             <a:fld id="{11ECD596-81E3-4803-8919-6962D4E4C98D}" type="datetimeFigureOut">
               <a:rPr lang="en-US" smtClean="0"/>
-              <a:t>9/13/2019</a:t>
+              <a:t>8/24/2025</a:t>
             </a:fld>
             <a:endParaRPr lang="en-US"/>
           </a:p>
@@ -1128,7 +1146,7 @@
           <a:lstStyle/>
           <a:p>
             <a:r>
-              <a:rPr lang="en-US" altLang="zh-TW" smtClean="0"/>
+              <a:rPr lang="en-US" altLang="zh-TW"/>
               <a:t>Click to edit Master title style</a:t>
             </a:r>
             <a:endParaRPr lang="zh-TW" altLang="en-US"/>
@@ -1185,35 +1203,35 @@
           <a:p>
             <a:pPr lvl="0"/>
             <a:r>
-              <a:rPr lang="en-US" altLang="zh-TW" smtClean="0"/>
+              <a:rPr lang="en-US" altLang="zh-TW"/>
               <a:t>Click to edit Master text styles</a:t>
             </a:r>
           </a:p>
           <a:p>
             <a:pPr lvl="1"/>
             <a:r>
-              <a:rPr lang="en-US" altLang="zh-TW" smtClean="0"/>
+              <a:rPr lang="en-US" altLang="zh-TW"/>
               <a:t>Second level</a:t>
             </a:r>
           </a:p>
           <a:p>
             <a:pPr lvl="2"/>
             <a:r>
-              <a:rPr lang="en-US" altLang="zh-TW" smtClean="0"/>
+              <a:rPr lang="en-US" altLang="zh-TW"/>
               <a:t>Third level</a:t>
             </a:r>
           </a:p>
           <a:p>
             <a:pPr lvl="3"/>
             <a:r>
-              <a:rPr lang="en-US" altLang="zh-TW" smtClean="0"/>
+              <a:rPr lang="en-US" altLang="zh-TW"/>
               <a:t>Fourth level</a:t>
             </a:r>
           </a:p>
           <a:p>
             <a:pPr lvl="4"/>
             <a:r>
-              <a:rPr lang="en-US" altLang="zh-TW" smtClean="0"/>
+              <a:rPr lang="en-US" altLang="zh-TW"/>
               <a:t>Fifth level</a:t>
             </a:r>
             <a:endParaRPr lang="zh-TW" altLang="en-US"/>
@@ -1270,35 +1288,35 @@
           <a:p>
             <a:pPr lvl="0"/>
             <a:r>
-              <a:rPr lang="en-US" altLang="zh-TW" smtClean="0"/>
+              <a:rPr lang="en-US" altLang="zh-TW"/>
               <a:t>Click to edit Master text styles</a:t>
             </a:r>
           </a:p>
           <a:p>
             <a:pPr lvl="1"/>
             <a:r>
-              <a:rPr lang="en-US" altLang="zh-TW" smtClean="0"/>
+              <a:rPr lang="en-US" altLang="zh-TW"/>
               <a:t>Second level</a:t>
             </a:r>
           </a:p>
           <a:p>
             <a:pPr lvl="2"/>
             <a:r>
-              <a:rPr lang="en-US" altLang="zh-TW" smtClean="0"/>
+              <a:rPr lang="en-US" altLang="zh-TW"/>
               <a:t>Third level</a:t>
             </a:r>
           </a:p>
           <a:p>
             <a:pPr lvl="3"/>
             <a:r>
-              <a:rPr lang="en-US" altLang="zh-TW" smtClean="0"/>
+              <a:rPr lang="en-US" altLang="zh-TW"/>
               <a:t>Fourth level</a:t>
             </a:r>
           </a:p>
           <a:p>
             <a:pPr lvl="4"/>
             <a:r>
-              <a:rPr lang="en-US" altLang="zh-TW" smtClean="0"/>
+              <a:rPr lang="en-US" altLang="zh-TW"/>
               <a:t>Fifth level</a:t>
             </a:r>
             <a:endParaRPr lang="zh-TW" altLang="en-US"/>
@@ -1322,7 +1340,7 @@
           <a:p>
             <a:fld id="{11ECD596-81E3-4803-8919-6962D4E4C98D}" type="datetimeFigureOut">
               <a:rPr lang="en-US" smtClean="0"/>
-              <a:t>9/13/2019</a:t>
+              <a:t>8/24/2025</a:t>
             </a:fld>
             <a:endParaRPr lang="en-US"/>
           </a:p>
@@ -1415,7 +1433,7 @@
           </a:lstStyle>
           <a:p>
             <a:r>
-              <a:rPr lang="en-US" altLang="zh-TW" smtClean="0"/>
+              <a:rPr lang="en-US" altLang="zh-TW"/>
               <a:t>Click to edit Master title style</a:t>
             </a:r>
             <a:endParaRPr lang="zh-TW" altLang="en-US"/>
@@ -1481,7 +1499,7 @@
           <a:p>
             <a:pPr lvl="0"/>
             <a:r>
-              <a:rPr lang="en-US" altLang="zh-TW" smtClean="0"/>
+              <a:rPr lang="en-US" altLang="zh-TW"/>
               <a:t>Click to edit Master text styles</a:t>
             </a:r>
           </a:p>
@@ -1537,35 +1555,35 @@
           <a:p>
             <a:pPr lvl="0"/>
             <a:r>
-              <a:rPr lang="en-US" altLang="zh-TW" smtClean="0"/>
+              <a:rPr lang="en-US" altLang="zh-TW"/>
               <a:t>Click to edit Master text styles</a:t>
             </a:r>
           </a:p>
           <a:p>
             <a:pPr lvl="1"/>
             <a:r>
-              <a:rPr lang="en-US" altLang="zh-TW" smtClean="0"/>
+              <a:rPr lang="en-US" altLang="zh-TW"/>
               <a:t>Second level</a:t>
             </a:r>
           </a:p>
           <a:p>
             <a:pPr lvl="2"/>
             <a:r>
-              <a:rPr lang="en-US" altLang="zh-TW" smtClean="0"/>
+              <a:rPr lang="en-US" altLang="zh-TW"/>
               <a:t>Third level</a:t>
             </a:r>
           </a:p>
           <a:p>
             <a:pPr lvl="3"/>
             <a:r>
-              <a:rPr lang="en-US" altLang="zh-TW" smtClean="0"/>
+              <a:rPr lang="en-US" altLang="zh-TW"/>
               <a:t>Fourth level</a:t>
             </a:r>
           </a:p>
           <a:p>
             <a:pPr lvl="4"/>
             <a:r>
-              <a:rPr lang="en-US" altLang="zh-TW" smtClean="0"/>
+              <a:rPr lang="en-US" altLang="zh-TW"/>
               <a:t>Fifth level</a:t>
             </a:r>
             <a:endParaRPr lang="zh-TW" altLang="en-US"/>
@@ -1631,7 +1649,7 @@
           <a:p>
             <a:pPr lvl="0"/>
             <a:r>
-              <a:rPr lang="en-US" altLang="zh-TW" smtClean="0"/>
+              <a:rPr lang="en-US" altLang="zh-TW"/>
               <a:t>Click to edit Master text styles</a:t>
             </a:r>
           </a:p>
@@ -1687,35 +1705,35 @@
           <a:p>
             <a:pPr lvl="0"/>
             <a:r>
-              <a:rPr lang="en-US" altLang="zh-TW" smtClean="0"/>
+              <a:rPr lang="en-US" altLang="zh-TW"/>
               <a:t>Click to edit Master text styles</a:t>
             </a:r>
           </a:p>
           <a:p>
             <a:pPr lvl="1"/>
             <a:r>
-              <a:rPr lang="en-US" altLang="zh-TW" smtClean="0"/>
+              <a:rPr lang="en-US" altLang="zh-TW"/>
               <a:t>Second level</a:t>
             </a:r>
           </a:p>
           <a:p>
             <a:pPr lvl="2"/>
             <a:r>
-              <a:rPr lang="en-US" altLang="zh-TW" smtClean="0"/>
+              <a:rPr lang="en-US" altLang="zh-TW"/>
               <a:t>Third level</a:t>
             </a:r>
           </a:p>
           <a:p>
             <a:pPr lvl="3"/>
             <a:r>
-              <a:rPr lang="en-US" altLang="zh-TW" smtClean="0"/>
+              <a:rPr lang="en-US" altLang="zh-TW"/>
               <a:t>Fourth level</a:t>
             </a:r>
           </a:p>
           <a:p>
             <a:pPr lvl="4"/>
             <a:r>
-              <a:rPr lang="en-US" altLang="zh-TW" smtClean="0"/>
+              <a:rPr lang="en-US" altLang="zh-TW"/>
               <a:t>Fifth level</a:t>
             </a:r>
             <a:endParaRPr lang="zh-TW" altLang="en-US"/>
@@ -1739,7 +1757,7 @@
           <a:p>
             <a:fld id="{11ECD596-81E3-4803-8919-6962D4E4C98D}" type="datetimeFigureOut">
               <a:rPr lang="en-US" smtClean="0"/>
-              <a:t>9/13/2019</a:t>
+              <a:t>8/24/2025</a:t>
             </a:fld>
             <a:endParaRPr lang="en-US"/>
           </a:p>
@@ -1828,7 +1846,7 @@
           <a:lstStyle/>
           <a:p>
             <a:r>
-              <a:rPr lang="en-US" altLang="zh-TW" smtClean="0"/>
+              <a:rPr lang="en-US" altLang="zh-TW"/>
               <a:t>Click to edit Master title style</a:t>
             </a:r>
             <a:endParaRPr lang="zh-TW" altLang="en-US"/>
@@ -1852,7 +1870,7 @@
           <a:p>
             <a:fld id="{11ECD596-81E3-4803-8919-6962D4E4C98D}" type="datetimeFigureOut">
               <a:rPr lang="en-US" smtClean="0"/>
-              <a:t>9/13/2019</a:t>
+              <a:t>8/24/2025</a:t>
             </a:fld>
             <a:endParaRPr lang="en-US"/>
           </a:p>
@@ -1942,7 +1960,7 @@
           <a:p>
             <a:fld id="{11ECD596-81E3-4803-8919-6962D4E4C98D}" type="datetimeFigureOut">
               <a:rPr lang="en-US" smtClean="0"/>
-              <a:t>9/13/2019</a:t>
+              <a:t>8/24/2025</a:t>
             </a:fld>
             <a:endParaRPr lang="en-US"/>
           </a:p>
@@ -2040,7 +2058,7 @@
           </a:lstStyle>
           <a:p>
             <a:r>
-              <a:rPr lang="en-US" altLang="zh-TW" smtClean="0"/>
+              <a:rPr lang="en-US" altLang="zh-TW"/>
               <a:t>Click to edit Master title style</a:t>
             </a:r>
             <a:endParaRPr lang="zh-TW" altLang="en-US"/>
@@ -2097,35 +2115,35 @@
           <a:p>
             <a:pPr lvl="0"/>
             <a:r>
-              <a:rPr lang="en-US" altLang="zh-TW" smtClean="0"/>
+              <a:rPr lang="en-US" altLang="zh-TW"/>
               <a:t>Click to edit Master text styles</a:t>
             </a:r>
           </a:p>
           <a:p>
             <a:pPr lvl="1"/>
             <a:r>
-              <a:rPr lang="en-US" altLang="zh-TW" smtClean="0"/>
+              <a:rPr lang="en-US" altLang="zh-TW"/>
               <a:t>Second level</a:t>
             </a:r>
           </a:p>
           <a:p>
             <a:pPr lvl="2"/>
             <a:r>
-              <a:rPr lang="en-US" altLang="zh-TW" smtClean="0"/>
+              <a:rPr lang="en-US" altLang="zh-TW"/>
               <a:t>Third level</a:t>
             </a:r>
           </a:p>
           <a:p>
             <a:pPr lvl="3"/>
             <a:r>
-              <a:rPr lang="en-US" altLang="zh-TW" smtClean="0"/>
+              <a:rPr lang="en-US" altLang="zh-TW"/>
               <a:t>Fourth level</a:t>
             </a:r>
           </a:p>
           <a:p>
             <a:pPr lvl="4"/>
             <a:r>
-              <a:rPr lang="en-US" altLang="zh-TW" smtClean="0"/>
+              <a:rPr lang="en-US" altLang="zh-TW"/>
               <a:t>Fifth level</a:t>
             </a:r>
             <a:endParaRPr lang="zh-TW" altLang="en-US"/>
@@ -2191,7 +2209,7 @@
           <a:p>
             <a:pPr lvl="0"/>
             <a:r>
-              <a:rPr lang="en-US" altLang="zh-TW" smtClean="0"/>
+              <a:rPr lang="en-US" altLang="zh-TW"/>
               <a:t>Click to edit Master text styles</a:t>
             </a:r>
           </a:p>
@@ -2214,7 +2232,7 @@
           <a:p>
             <a:fld id="{11ECD596-81E3-4803-8919-6962D4E4C98D}" type="datetimeFigureOut">
               <a:rPr lang="en-US" smtClean="0"/>
-              <a:t>9/13/2019</a:t>
+              <a:t>8/24/2025</a:t>
             </a:fld>
             <a:endParaRPr lang="en-US"/>
           </a:p>
@@ -2312,7 +2330,7 @@
           </a:lstStyle>
           <a:p>
             <a:r>
-              <a:rPr lang="en-US" altLang="zh-TW" smtClean="0"/>
+              <a:rPr lang="en-US" altLang="zh-TW"/>
               <a:t>Click to edit Master title style</a:t>
             </a:r>
             <a:endParaRPr lang="zh-TW" altLang="en-US"/>
@@ -2377,7 +2395,7 @@
           </a:lstStyle>
           <a:p>
             <a:r>
-              <a:rPr lang="en-US" altLang="zh-TW" smtClean="0"/>
+              <a:rPr lang="en-US" altLang="zh-TW"/>
               <a:t>Click icon to add picture</a:t>
             </a:r>
             <a:endParaRPr lang="zh-TW" altLang="en-US"/>
@@ -2443,7 +2461,7 @@
           <a:p>
             <a:pPr lvl="0"/>
             <a:r>
-              <a:rPr lang="en-US" altLang="zh-TW" smtClean="0"/>
+              <a:rPr lang="en-US" altLang="zh-TW"/>
               <a:t>Click to edit Master text styles</a:t>
             </a:r>
           </a:p>
@@ -2466,7 +2484,7 @@
           <a:p>
             <a:fld id="{11ECD596-81E3-4803-8919-6962D4E4C98D}" type="datetimeFigureOut">
               <a:rPr lang="en-US" smtClean="0"/>
-              <a:t>9/13/2019</a:t>
+              <a:t>8/24/2025</a:t>
             </a:fld>
             <a:endParaRPr lang="en-US"/>
           </a:p>
@@ -2575,10 +2593,9 @@
           <a:lstStyle/>
           <a:p>
             <a:r>
-              <a:rPr lang="zh-TW" altLang="en-US" smtClean="0"/>
+              <a:rPr lang="zh-TW" altLang="en-US"/>
               <a:t>按一下以編輯母片標題樣式</a:t>
             </a:r>
-            <a:endParaRPr lang="zh-TW" altLang="en-US"/>
           </a:p>
         </p:txBody>
       </p:sp>
@@ -2609,38 +2626,37 @@
           <a:p>
             <a:pPr lvl="0"/>
             <a:r>
-              <a:rPr lang="zh-TW" altLang="en-US" smtClean="0"/>
+              <a:rPr lang="zh-TW" altLang="en-US"/>
               <a:t>按一下以編輯母片文字樣式</a:t>
             </a:r>
           </a:p>
           <a:p>
             <a:pPr lvl="1"/>
             <a:r>
-              <a:rPr lang="zh-TW" altLang="en-US" smtClean="0"/>
+              <a:rPr lang="zh-TW" altLang="en-US"/>
               <a:t>第二層</a:t>
             </a:r>
           </a:p>
           <a:p>
             <a:pPr lvl="2"/>
             <a:r>
-              <a:rPr lang="zh-TW" altLang="en-US" smtClean="0"/>
+              <a:rPr lang="zh-TW" altLang="en-US"/>
               <a:t>第三層</a:t>
             </a:r>
           </a:p>
           <a:p>
             <a:pPr lvl="3"/>
             <a:r>
-              <a:rPr lang="zh-TW" altLang="en-US" smtClean="0"/>
+              <a:rPr lang="zh-TW" altLang="en-US"/>
               <a:t>第四層</a:t>
             </a:r>
           </a:p>
           <a:p>
             <a:pPr lvl="4"/>
             <a:r>
-              <a:rPr lang="zh-TW" altLang="en-US" smtClean="0"/>
+              <a:rPr lang="zh-TW" altLang="en-US"/>
               <a:t>第五層</a:t>
             </a:r>
-            <a:endParaRPr lang="zh-TW" altLang="en-US"/>
           </a:p>
         </p:txBody>
       </p:sp>
@@ -2679,7 +2695,7 @@
           <a:p>
             <a:fld id="{11ECD596-81E3-4803-8919-6962D4E4C98D}" type="datetimeFigureOut">
               <a:rPr lang="en-US" smtClean="0"/>
-              <a:t>9/13/2019</a:t>
+              <a:t>8/24/2025</a:t>
             </a:fld>
             <a:endParaRPr lang="en-US"/>
           </a:p>
@@ -3037,7 +3053,13 @@
   <p:cSld>
     <p:spTree>
       <p:nvGrpSpPr>
-        <p:cNvPr id="1" name=""/>
+        <p:cNvPr id="1" name="">
+          <a:extLst>
+            <a:ext uri="{FF2B5EF4-FFF2-40B4-BE49-F238E27FC236}">
+              <a16:creationId xmlns:a16="http://schemas.microsoft.com/office/drawing/2014/main" id="{5F20F3D7-EDDF-CE30-9060-314A88E3730B}"/>
+            </a:ext>
+          </a:extLst>
+        </p:cNvPr>
         <p:cNvGrpSpPr/>
         <p:nvPr/>
       </p:nvGrpSpPr>
@@ -3051,7 +3073,13 @@
       </p:grpSpPr>
       <p:sp>
         <p:nvSpPr>
-          <p:cNvPr id="2" name="Title 1"/>
+          <p:cNvPr id="4" name="標題 3">
+            <a:extLst>
+              <a:ext uri="{FF2B5EF4-FFF2-40B4-BE49-F238E27FC236}">
+                <a16:creationId xmlns:a16="http://schemas.microsoft.com/office/drawing/2014/main" id="{CD6A41DD-B5E6-D530-EC0F-85726817D119}"/>
+              </a:ext>
+            </a:extLst>
+          </p:cNvPr>
           <p:cNvSpPr>
             <a:spLocks noGrp="1"/>
           </p:cNvSpPr>
@@ -3059,134 +3087,42 @@
             <p:ph type="title"/>
           </p:nvPr>
         </p:nvSpPr>
-        <p:spPr/>
-        <p:txBody>
-          <a:bodyPr>
-            <a:normAutofit/>
-          </a:bodyPr>
-          <a:lstStyle/>
-          <a:p>
-            <a:r>
-              <a:rPr lang="zh-TW" altLang="en-US" sz="4000" b="1" dirty="0">
-                <a:latin typeface="Microsoft JhengHei" pitchFamily="34" charset="-120"/>
-                <a:ea typeface="Microsoft JhengHei" pitchFamily="34" charset="-120"/>
-              </a:rPr>
-              <a:t>我在這裡敬拜</a:t>
-            </a:r>
-            <a:endParaRPr lang="en-US" sz="4000" b="1" dirty="0">
-              <a:latin typeface="Microsoft JhengHei" pitchFamily="34" charset="-120"/>
-              <a:ea typeface="Microsoft JhengHei" pitchFamily="34" charset="-120"/>
-            </a:endParaRPr>
-          </a:p>
-        </p:txBody>
-      </p:sp>
-      <p:sp>
-        <p:nvSpPr>
-          <p:cNvPr id="3" name="Content Placeholder 2"/>
-          <p:cNvSpPr>
-            <a:spLocks noGrp="1"/>
-          </p:cNvSpPr>
-          <p:nvPr>
-            <p:ph idx="1"/>
-          </p:nvPr>
-        </p:nvSpPr>
-        <p:spPr/>
+        <p:spPr>
+          <a:xfrm>
+            <a:off x="0" y="1995686"/>
+            <a:ext cx="9144000" cy="857250"/>
+          </a:xfrm>
+        </p:spPr>
         <p:txBody>
           <a:bodyPr>
             <a:noAutofit/>
           </a:bodyPr>
           <a:lstStyle/>
           <a:p>
-            <a:pPr marL="0" indent="0" algn="ctr">
-              <a:buNone/>
-            </a:pPr>
-            <a:r>
-              <a:rPr lang="zh-TW" altLang="en-US" sz="4800" b="1" dirty="0">
-                <a:latin typeface="Microsoft JhengHei" pitchFamily="34" charset="-120"/>
-                <a:ea typeface="Microsoft JhengHei" pitchFamily="34" charset="-120"/>
+            <a:r>
+              <a:rPr lang="zh-TW" altLang="en-US" sz="5400" b="1" i="1" dirty="0">
+                <a:solidFill>
+                  <a:srgbClr val="000066"/>
+                </a:solidFill>
+                <a:effectLst>
+                  <a:outerShdw blurRad="38100" dist="38100" dir="2700000" algn="tl">
+                    <a:srgbClr val="000000">
+                      <a:alpha val="43137"/>
+                    </a:srgbClr>
+                  </a:outerShdw>
+                </a:effectLst>
+                <a:latin typeface="微軟正黑體" pitchFamily="34" charset="-120"/>
+                <a:ea typeface="微軟正黑體" pitchFamily="34" charset="-120"/>
               </a:rPr>
-              <a:t>神你是光 你照亮了黑暗 </a:t>
-            </a:r>
-            <a:endParaRPr lang="en-US" altLang="zh-TW" sz="4800" b="1" dirty="0" smtClean="0">
-              <a:latin typeface="Microsoft JhengHei" pitchFamily="34" charset="-120"/>
-              <a:ea typeface="Microsoft JhengHei" pitchFamily="34" charset="-120"/>
-            </a:endParaRPr>
-          </a:p>
-          <a:p>
-            <a:pPr marL="0" indent="0" algn="ctr">
-              <a:buNone/>
-            </a:pPr>
-            <a:r>
-              <a:rPr lang="zh-TW" altLang="en-US" sz="4800" b="1" dirty="0" smtClean="0">
-                <a:latin typeface="Microsoft JhengHei" pitchFamily="34" charset="-120"/>
-                <a:ea typeface="Microsoft JhengHei" pitchFamily="34" charset="-120"/>
-              </a:rPr>
-              <a:t>開</a:t>
-            </a:r>
-            <a:r>
-              <a:rPr lang="zh-TW" altLang="en-US" sz="4800" b="1" dirty="0">
-                <a:latin typeface="Microsoft JhengHei" pitchFamily="34" charset="-120"/>
-                <a:ea typeface="Microsoft JhengHei" pitchFamily="34" charset="-120"/>
-              </a:rPr>
-              <a:t>我眼讓我看見 </a:t>
-            </a:r>
-            <a:endParaRPr lang="en-US" altLang="zh-TW" sz="4800" b="1" dirty="0" smtClean="0">
-              <a:latin typeface="Microsoft JhengHei" pitchFamily="34" charset="-120"/>
-              <a:ea typeface="Microsoft JhengHei" pitchFamily="34" charset="-120"/>
-            </a:endParaRPr>
-          </a:p>
-          <a:p>
-            <a:pPr marL="0" indent="0" algn="ctr">
-              <a:buNone/>
-            </a:pPr>
-            <a:r>
-              <a:rPr lang="zh-TW" altLang="en-US" sz="4800" b="1" dirty="0" smtClean="0">
-                <a:latin typeface="Microsoft JhengHei" pitchFamily="34" charset="-120"/>
-                <a:ea typeface="Microsoft JhengHei" pitchFamily="34" charset="-120"/>
-              </a:rPr>
-              <a:t>你</a:t>
-            </a:r>
-            <a:r>
-              <a:rPr lang="zh-TW" altLang="en-US" sz="4800" b="1" dirty="0">
-                <a:latin typeface="Microsoft JhengHei" pitchFamily="34" charset="-120"/>
-                <a:ea typeface="Microsoft JhengHei" pitchFamily="34" charset="-120"/>
-              </a:rPr>
-              <a:t>的榮美 讓我心渴慕你 </a:t>
-            </a:r>
-            <a:endParaRPr lang="en-US" altLang="zh-TW" sz="4800" b="1" dirty="0" smtClean="0">
-              <a:latin typeface="Microsoft JhengHei" pitchFamily="34" charset="-120"/>
-              <a:ea typeface="Microsoft JhengHei" pitchFamily="34" charset="-120"/>
-            </a:endParaRPr>
-          </a:p>
-          <a:p>
-            <a:pPr marL="0" indent="0" algn="ctr">
-              <a:buNone/>
-            </a:pPr>
-            <a:r>
-              <a:rPr lang="zh-TW" altLang="en-US" sz="4800" b="1" dirty="0" smtClean="0">
-                <a:latin typeface="Microsoft JhengHei" pitchFamily="34" charset="-120"/>
-                <a:ea typeface="Microsoft JhengHei" pitchFamily="34" charset="-120"/>
-              </a:rPr>
-              <a:t>希</a:t>
-            </a:r>
-            <a:r>
-              <a:rPr lang="zh-TW" altLang="en-US" sz="4800" b="1" dirty="0">
-                <a:latin typeface="Microsoft JhengHei" pitchFamily="34" charset="-120"/>
-                <a:ea typeface="Microsoft JhengHei" pitchFamily="34" charset="-120"/>
-              </a:rPr>
-              <a:t>望與你不分離</a:t>
-            </a:r>
-            <a:endParaRPr lang="en-US" sz="4800" b="1" dirty="0">
-              <a:latin typeface="Microsoft JhengHei" pitchFamily="34" charset="-120"/>
-              <a:ea typeface="Microsoft JhengHei" pitchFamily="34" charset="-120"/>
-            </a:endParaRPr>
+              <a:t>我在這裡敬拜</a:t>
+            </a:r>
           </a:p>
         </p:txBody>
       </p:sp>
     </p:spTree>
     <p:extLst>
       <p:ext uri="{BB962C8B-B14F-4D97-AF65-F5344CB8AC3E}">
-        <p14:creationId xmlns:p14="http://schemas.microsoft.com/office/powerpoint/2010/main" val="2769915112"/>
+        <p14:creationId xmlns:p14="http://schemas.microsoft.com/office/powerpoint/2010/main" val="388492399"/>
       </p:ext>
     </p:extLst>
   </p:cSld>
@@ -3201,7 +3137,13 @@
   <p:cSld>
     <p:spTree>
       <p:nvGrpSpPr>
-        <p:cNvPr id="1" name=""/>
+        <p:cNvPr id="1" name="">
+          <a:extLst>
+            <a:ext uri="{FF2B5EF4-FFF2-40B4-BE49-F238E27FC236}">
+              <a16:creationId xmlns:a16="http://schemas.microsoft.com/office/drawing/2014/main" id="{499F6A04-361B-D03C-72FC-83746A3861FC}"/>
+            </a:ext>
+          </a:extLst>
+        </p:cNvPr>
         <p:cNvGrpSpPr/>
         <p:nvPr/>
       </p:nvGrpSpPr>
@@ -3215,139 +3157,137 @@
       </p:grpSpPr>
       <p:sp>
         <p:nvSpPr>
-          <p:cNvPr id="2" name="Title 1"/>
-          <p:cNvSpPr>
-            <a:spLocks noGrp="1"/>
-          </p:cNvSpPr>
-          <p:nvPr>
-            <p:ph type="title"/>
-          </p:nvPr>
-        </p:nvSpPr>
-        <p:spPr/>
-        <p:txBody>
-          <a:bodyPr>
+          <p:cNvPr id="5" name="內容版面配置區 4">
+            <a:extLst>
+              <a:ext uri="{FF2B5EF4-FFF2-40B4-BE49-F238E27FC236}">
+                <a16:creationId xmlns:a16="http://schemas.microsoft.com/office/drawing/2014/main" id="{EE77592B-EE8B-614D-4160-CDFC7BCE80DB}"/>
+              </a:ext>
+            </a:extLst>
+          </p:cNvPr>
+          <p:cNvSpPr>
+            <a:spLocks noGrp="1"/>
+          </p:cNvSpPr>
+          <p:nvPr>
+            <p:ph idx="1"/>
+          </p:nvPr>
+        </p:nvSpPr>
+        <p:spPr>
+          <a:xfrm>
+            <a:off x="0" y="1563639"/>
+            <a:ext cx="9144000" cy="1803647"/>
+          </a:xfrm>
+        </p:spPr>
+        <p:txBody>
+          <a:bodyPr anchor="ctr">
             <a:normAutofit/>
           </a:bodyPr>
           <a:lstStyle/>
           <a:p>
-            <a:r>
-              <a:rPr lang="zh-TW" altLang="en-US" sz="4000" b="1" dirty="0">
-                <a:latin typeface="Microsoft JhengHei" pitchFamily="34" charset="-120"/>
-                <a:ea typeface="Microsoft JhengHei" pitchFamily="34" charset="-120"/>
+            <a:pPr algn="ctr">
+              <a:buNone/>
+            </a:pPr>
+            <a:r>
+              <a:rPr lang="zh-TW" altLang="en-US" sz="4800" b="1" dirty="0">
+                <a:solidFill>
+                  <a:srgbClr val="000066"/>
+                </a:solidFill>
+                <a:latin typeface="微軟正黑體" pitchFamily="34" charset="-120"/>
+                <a:ea typeface="微軟正黑體" pitchFamily="34" charset="-120"/>
               </a:rPr>
-              <a:t>我在這裡敬拜</a:t>
-            </a:r>
-            <a:endParaRPr lang="en-US" sz="4000" b="1" dirty="0">
-              <a:latin typeface="Microsoft JhengHei" pitchFamily="34" charset="-120"/>
-              <a:ea typeface="Microsoft JhengHei" pitchFamily="34" charset="-120"/>
-            </a:endParaRPr>
-          </a:p>
-        </p:txBody>
-      </p:sp>
-      <p:sp>
-        <p:nvSpPr>
-          <p:cNvPr id="3" name="Content Placeholder 2"/>
-          <p:cNvSpPr>
-            <a:spLocks noGrp="1"/>
-          </p:cNvSpPr>
-          <p:nvPr>
-            <p:ph idx="1"/>
-          </p:nvPr>
+              <a:t>神祢是光  祢照亮了黑暗 </a:t>
+            </a:r>
+          </a:p>
+          <a:p>
+            <a:pPr algn="ctr">
+              <a:buNone/>
+            </a:pPr>
+            <a:r>
+              <a:rPr lang="zh-TW" altLang="en-US" sz="4800" b="1" dirty="0">
+                <a:solidFill>
+                  <a:srgbClr val="000066"/>
+                </a:solidFill>
+                <a:latin typeface="微軟正黑體" pitchFamily="34" charset="-120"/>
+                <a:ea typeface="微軟正黑體" pitchFamily="34" charset="-120"/>
+              </a:rPr>
+              <a:t>開我眼讓我看見 </a:t>
+            </a:r>
+          </a:p>
+        </p:txBody>
+      </p:sp>
+      <p:sp>
+        <p:nvSpPr>
+          <p:cNvPr id="3" name="TextBox 2">
+            <a:extLst>
+              <a:ext uri="{FF2B5EF4-FFF2-40B4-BE49-F238E27FC236}">
+                <a16:creationId xmlns:a16="http://schemas.microsoft.com/office/drawing/2014/main" id="{FA175DD0-F211-14DE-420F-4A50F79B6BD2}"/>
+              </a:ext>
+            </a:extLst>
+          </p:cNvPr>
+          <p:cNvSpPr txBox="1"/>
+          <p:nvPr/>
         </p:nvSpPr>
         <p:spPr>
           <a:xfrm>
-            <a:off x="0" y="1200151"/>
-            <a:ext cx="9144000" cy="3394472"/>
+            <a:off x="0" y="3867895"/>
+            <a:ext cx="9144000" cy="461665"/>
           </a:xfrm>
+          <a:prstGeom prst="rect">
+            <a:avLst/>
+          </a:prstGeom>
+          <a:noFill/>
         </p:spPr>
         <p:txBody>
-          <a:bodyPr>
-            <a:noAutofit/>
+          <a:bodyPr wrap="square" rtlCol="0">
+            <a:spAutoFit/>
           </a:bodyPr>
           <a:lstStyle/>
           <a:p>
-            <a:pPr marL="0" indent="0" algn="ctr">
-              <a:buNone/>
-            </a:pPr>
-            <a:r>
-              <a:rPr lang="zh-TW" altLang="en-US" sz="4800" b="1" dirty="0">
-                <a:latin typeface="Microsoft JhengHei" pitchFamily="34" charset="-120"/>
-                <a:ea typeface="Microsoft JhengHei" pitchFamily="34" charset="-120"/>
+            <a:pPr algn="ctr"/>
+            <a:r>
+              <a:rPr lang="en-US" sz="2400" b="1" dirty="0">
+                <a:solidFill>
+                  <a:srgbClr val="000066"/>
+                </a:solidFill>
+                <a:latin typeface="Microsoft JhengHei" panose="020B0604030504040204" pitchFamily="34" charset="-120"/>
+                <a:ea typeface="Microsoft JhengHei" panose="020B0604030504040204" pitchFamily="34" charset="-120"/>
               </a:rPr>
-              <a:t>我在這裡敬拜 屈膝向你跪拜 </a:t>
-            </a:r>
-            <a:endParaRPr lang="en-US" altLang="zh-TW" sz="4800" b="1" dirty="0">
-              <a:latin typeface="Microsoft JhengHei" pitchFamily="34" charset="-120"/>
-              <a:ea typeface="Microsoft JhengHei" pitchFamily="34" charset="-120"/>
-            </a:endParaRPr>
-          </a:p>
-          <a:p>
-            <a:pPr marL="0" indent="0" algn="ctr">
-              <a:buNone/>
-            </a:pPr>
-            <a:r>
-              <a:rPr lang="zh-TW" altLang="en-US" sz="4800" b="1" dirty="0">
-                <a:latin typeface="Microsoft JhengHei" pitchFamily="34" charset="-120"/>
-                <a:ea typeface="Microsoft JhengHei" pitchFamily="34" charset="-120"/>
+              <a:t>( </a:t>
+            </a:r>
+            <a:r>
+              <a:rPr lang="zh-CN" altLang="en-US" sz="2400" b="1" dirty="0">
+                <a:solidFill>
+                  <a:srgbClr val="000066"/>
+                </a:solidFill>
+                <a:latin typeface="Microsoft JhengHei" panose="020B0604030504040204" pitchFamily="34" charset="-120"/>
+                <a:ea typeface="Microsoft JhengHei" panose="020B0604030504040204" pitchFamily="34" charset="-120"/>
               </a:rPr>
-              <a:t>大</a:t>
-            </a:r>
-            <a:r>
-              <a:rPr lang="zh-TW" altLang="en-US" sz="4800" b="1" dirty="0">
-                <a:latin typeface="Microsoft JhengHei" pitchFamily="34" charset="-120"/>
-                <a:ea typeface="Microsoft JhengHei" pitchFamily="34" charset="-120"/>
+              <a:t>正歌</a:t>
+            </a:r>
+            <a:r>
+              <a:rPr lang="en-US" altLang="zh-CN" sz="2400" b="1" dirty="0">
+                <a:solidFill>
+                  <a:srgbClr val="000066"/>
+                </a:solidFill>
+                <a:latin typeface="Microsoft JhengHei" panose="020B0604030504040204" pitchFamily="34" charset="-120"/>
+                <a:ea typeface="Microsoft JhengHei" panose="020B0604030504040204" pitchFamily="34" charset="-120"/>
               </a:rPr>
-              <a:t>聲宣告你是我的神 </a:t>
-            </a:r>
-            <a:endParaRPr lang="en-US" altLang="zh-TW" sz="4800" b="1" dirty="0">
-              <a:latin typeface="Microsoft JhengHei" pitchFamily="34" charset="-120"/>
-              <a:ea typeface="Microsoft JhengHei" pitchFamily="34" charset="-120"/>
-            </a:endParaRPr>
-          </a:p>
-          <a:p>
-            <a:pPr marL="0" indent="0" algn="ctr">
-              <a:buNone/>
-            </a:pPr>
-            <a:r>
-              <a:rPr lang="zh-TW" altLang="en-US" sz="4800" b="1" dirty="0">
-                <a:latin typeface="Microsoft JhengHei" pitchFamily="34" charset="-120"/>
-                <a:ea typeface="Microsoft JhengHei" pitchFamily="34" charset="-120"/>
+              <a:t> 1</a:t>
+            </a:r>
+            <a:r>
+              <a:rPr lang="en-US" sz="2400" b="1" dirty="0">
+                <a:solidFill>
+                  <a:srgbClr val="000066"/>
+                </a:solidFill>
+                <a:latin typeface="Microsoft JhengHei" panose="020B0604030504040204" pitchFamily="34" charset="-120"/>
+                <a:ea typeface="Microsoft JhengHei" panose="020B0604030504040204" pitchFamily="34" charset="-120"/>
               </a:rPr>
-              <a:t>噢 </a:t>
-            </a:r>
-            <a:r>
-              <a:rPr lang="zh-TW" altLang="en-US" sz="4800" b="1" dirty="0">
-                <a:latin typeface="Microsoft JhengHei" pitchFamily="34" charset="-120"/>
-                <a:ea typeface="Microsoft JhengHei" pitchFamily="34" charset="-120"/>
-              </a:rPr>
-              <a:t>你是如此美好 你是如此配得 </a:t>
-            </a:r>
-            <a:endParaRPr lang="en-US" altLang="zh-TW" sz="4800" b="1" dirty="0">
-              <a:latin typeface="Microsoft JhengHei" pitchFamily="34" charset="-120"/>
-              <a:ea typeface="Microsoft JhengHei" pitchFamily="34" charset="-120"/>
-            </a:endParaRPr>
-          </a:p>
-          <a:p>
-            <a:pPr marL="0" indent="0" algn="ctr">
-              <a:buNone/>
-            </a:pPr>
-            <a:r>
-              <a:rPr lang="zh-TW" altLang="en-US" sz="4800" b="1" dirty="0">
-                <a:latin typeface="Microsoft JhengHei" pitchFamily="34" charset="-120"/>
-                <a:ea typeface="Microsoft JhengHei" pitchFamily="34" charset="-120"/>
-              </a:rPr>
-              <a:t>我</a:t>
-            </a:r>
-            <a:r>
-              <a:rPr lang="zh-TW" altLang="en-US" sz="4800" b="1" dirty="0">
-                <a:latin typeface="Microsoft JhengHei" pitchFamily="34" charset="-120"/>
-                <a:ea typeface="Microsoft JhengHei" pitchFamily="34" charset="-120"/>
-              </a:rPr>
-              <a:t>在這裡敬拜你聖名</a:t>
-            </a:r>
-            <a:endParaRPr lang="en-US" sz="4800" b="1" dirty="0">
-              <a:latin typeface="Microsoft JhengHei" pitchFamily="34" charset="-120"/>
-              <a:ea typeface="Microsoft JhengHei" pitchFamily="34" charset="-120"/>
+              <a:t> )</a:t>
+            </a:r>
+            <a:endParaRPr lang="vi-VN" sz="2400" b="1" dirty="0">
+              <a:solidFill>
+                <a:srgbClr val="000066"/>
+              </a:solidFill>
+              <a:ea typeface="Microsoft JhengHei" panose="020B0604030504040204" pitchFamily="34" charset="-120"/>
             </a:endParaRPr>
           </a:p>
         </p:txBody>
@@ -3355,7 +3295,7 @@
     </p:spTree>
     <p:extLst>
       <p:ext uri="{BB962C8B-B14F-4D97-AF65-F5344CB8AC3E}">
-        <p14:creationId xmlns:p14="http://schemas.microsoft.com/office/powerpoint/2010/main" val="891816131"/>
+        <p14:creationId xmlns:p14="http://schemas.microsoft.com/office/powerpoint/2010/main" val="3885075056"/>
       </p:ext>
     </p:extLst>
   </p:cSld>
@@ -3370,7 +3310,13 @@
   <p:cSld>
     <p:spTree>
       <p:nvGrpSpPr>
-        <p:cNvPr id="1" name=""/>
+        <p:cNvPr id="1" name="">
+          <a:extLst>
+            <a:ext uri="{FF2B5EF4-FFF2-40B4-BE49-F238E27FC236}">
+              <a16:creationId xmlns:a16="http://schemas.microsoft.com/office/drawing/2014/main" id="{B16DB65C-1865-AD10-024C-97551533941F}"/>
+            </a:ext>
+          </a:extLst>
+        </p:cNvPr>
         <p:cNvGrpSpPr/>
         <p:nvPr/>
       </p:nvGrpSpPr>
@@ -3384,139 +3330,137 @@
       </p:grpSpPr>
       <p:sp>
         <p:nvSpPr>
-          <p:cNvPr id="2" name="Title 1"/>
-          <p:cNvSpPr>
-            <a:spLocks noGrp="1"/>
-          </p:cNvSpPr>
-          <p:nvPr>
-            <p:ph type="title"/>
-          </p:nvPr>
-        </p:nvSpPr>
-        <p:spPr/>
-        <p:txBody>
-          <a:bodyPr>
+          <p:cNvPr id="5" name="內容版面配置區 4">
+            <a:extLst>
+              <a:ext uri="{FF2B5EF4-FFF2-40B4-BE49-F238E27FC236}">
+                <a16:creationId xmlns:a16="http://schemas.microsoft.com/office/drawing/2014/main" id="{66A7EC33-D202-8B62-3E8A-9A624EF2B768}"/>
+              </a:ext>
+            </a:extLst>
+          </p:cNvPr>
+          <p:cNvSpPr>
+            <a:spLocks noGrp="1"/>
+          </p:cNvSpPr>
+          <p:nvPr>
+            <p:ph idx="1"/>
+          </p:nvPr>
+        </p:nvSpPr>
+        <p:spPr>
+          <a:xfrm>
+            <a:off x="0" y="1563639"/>
+            <a:ext cx="9144000" cy="1803647"/>
+          </a:xfrm>
+        </p:spPr>
+        <p:txBody>
+          <a:bodyPr anchor="ctr">
             <a:normAutofit/>
           </a:bodyPr>
           <a:lstStyle/>
           <a:p>
-            <a:r>
-              <a:rPr lang="zh-TW" altLang="en-US" sz="4000" b="1" dirty="0">
-                <a:latin typeface="Microsoft JhengHei" pitchFamily="34" charset="-120"/>
-                <a:ea typeface="Microsoft JhengHei" pitchFamily="34" charset="-120"/>
+            <a:pPr algn="ctr">
+              <a:buNone/>
+            </a:pPr>
+            <a:r>
+              <a:rPr lang="zh-TW" altLang="en-US" sz="4800" b="1" dirty="0">
+                <a:solidFill>
+                  <a:srgbClr val="000066"/>
+                </a:solidFill>
+                <a:latin typeface="微軟正黑體" pitchFamily="34" charset="-120"/>
+                <a:ea typeface="微軟正黑體" pitchFamily="34" charset="-120"/>
               </a:rPr>
-              <a:t>我在這裡敬拜</a:t>
-            </a:r>
-            <a:endParaRPr lang="en-US" sz="4000" b="1" dirty="0">
-              <a:latin typeface="Microsoft JhengHei" pitchFamily="34" charset="-120"/>
-              <a:ea typeface="Microsoft JhengHei" pitchFamily="34" charset="-120"/>
-            </a:endParaRPr>
-          </a:p>
-        </p:txBody>
-      </p:sp>
-      <p:sp>
-        <p:nvSpPr>
-          <p:cNvPr id="3" name="Content Placeholder 2"/>
-          <p:cNvSpPr>
-            <a:spLocks noGrp="1"/>
-          </p:cNvSpPr>
-          <p:nvPr>
-            <p:ph idx="1"/>
-          </p:nvPr>
+              <a:t>祢的榮美  讓我心渴慕祢 </a:t>
+            </a:r>
+          </a:p>
+          <a:p>
+            <a:pPr algn="ctr">
+              <a:buNone/>
+            </a:pPr>
+            <a:r>
+              <a:rPr lang="zh-TW" altLang="en-US" sz="4800" b="1" dirty="0">
+                <a:solidFill>
+                  <a:srgbClr val="000066"/>
+                </a:solidFill>
+                <a:latin typeface="微軟正黑體" pitchFamily="34" charset="-120"/>
+                <a:ea typeface="微軟正黑體" pitchFamily="34" charset="-120"/>
+              </a:rPr>
+              <a:t>希望與祢不分離</a:t>
+            </a:r>
+          </a:p>
+        </p:txBody>
+      </p:sp>
+      <p:sp>
+        <p:nvSpPr>
+          <p:cNvPr id="3" name="TextBox 2">
+            <a:extLst>
+              <a:ext uri="{FF2B5EF4-FFF2-40B4-BE49-F238E27FC236}">
+                <a16:creationId xmlns:a16="http://schemas.microsoft.com/office/drawing/2014/main" id="{2A8F52E2-4630-BA0F-DDB1-AF40AA68732B}"/>
+              </a:ext>
+            </a:extLst>
+          </p:cNvPr>
+          <p:cNvSpPr txBox="1"/>
+          <p:nvPr/>
         </p:nvSpPr>
         <p:spPr>
           <a:xfrm>
-            <a:off x="0" y="1200151"/>
-            <a:ext cx="9144000" cy="3394472"/>
+            <a:off x="0" y="3867895"/>
+            <a:ext cx="9144000" cy="461665"/>
           </a:xfrm>
+          <a:prstGeom prst="rect">
+            <a:avLst/>
+          </a:prstGeom>
+          <a:noFill/>
         </p:spPr>
         <p:txBody>
-          <a:bodyPr>
-            <a:noAutofit/>
+          <a:bodyPr wrap="square" rtlCol="0">
+            <a:spAutoFit/>
           </a:bodyPr>
           <a:lstStyle/>
           <a:p>
-            <a:pPr marL="0" indent="0" algn="ctr">
-              <a:buNone/>
-            </a:pPr>
-            <a:r>
-              <a:rPr lang="zh-TW" altLang="en-US" sz="4800" b="1" dirty="0">
-                <a:latin typeface="Microsoft JhengHei" pitchFamily="34" charset="-120"/>
-                <a:ea typeface="Microsoft JhengHei" pitchFamily="34" charset="-120"/>
+            <a:pPr algn="ctr"/>
+            <a:r>
+              <a:rPr lang="en-US" sz="2400" b="1" dirty="0">
+                <a:solidFill>
+                  <a:srgbClr val="000066"/>
+                </a:solidFill>
+                <a:latin typeface="Microsoft JhengHei" panose="020B0604030504040204" pitchFamily="34" charset="-120"/>
+                <a:ea typeface="Microsoft JhengHei" panose="020B0604030504040204" pitchFamily="34" charset="-120"/>
               </a:rPr>
-              <a:t>萬王之王 坐在至高寶座上 </a:t>
-            </a:r>
-            <a:endParaRPr lang="en-US" altLang="zh-TW" sz="4800" b="1" dirty="0">
-              <a:latin typeface="Microsoft JhengHei" pitchFamily="34" charset="-120"/>
-              <a:ea typeface="Microsoft JhengHei" pitchFamily="34" charset="-120"/>
-            </a:endParaRPr>
-          </a:p>
-          <a:p>
-            <a:pPr marL="0" indent="0" algn="ctr">
-              <a:buNone/>
-            </a:pPr>
-            <a:r>
-              <a:rPr lang="zh-TW" altLang="en-US" sz="4800" b="1" dirty="0">
-                <a:latin typeface="Microsoft JhengHei" pitchFamily="34" charset="-120"/>
-                <a:ea typeface="Microsoft JhengHei" pitchFamily="34" charset="-120"/>
+              <a:t>( </a:t>
+            </a:r>
+            <a:r>
+              <a:rPr lang="zh-CN" altLang="en-US" sz="2400" b="1" dirty="0">
+                <a:solidFill>
+                  <a:srgbClr val="000066"/>
+                </a:solidFill>
+                <a:latin typeface="Microsoft JhengHei" panose="020B0604030504040204" pitchFamily="34" charset="-120"/>
+                <a:ea typeface="Microsoft JhengHei" panose="020B0604030504040204" pitchFamily="34" charset="-120"/>
               </a:rPr>
-              <a:t>散</a:t>
-            </a:r>
-            <a:r>
-              <a:rPr lang="zh-TW" altLang="en-US" sz="4800" b="1" dirty="0">
-                <a:latin typeface="Microsoft JhengHei" pitchFamily="34" charset="-120"/>
-                <a:ea typeface="Microsoft JhengHei" pitchFamily="34" charset="-120"/>
+              <a:t>正歌</a:t>
+            </a:r>
+            <a:r>
+              <a:rPr lang="en-US" altLang="zh-CN" sz="2400" b="1" dirty="0">
+                <a:solidFill>
+                  <a:srgbClr val="000066"/>
+                </a:solidFill>
+                <a:latin typeface="Microsoft JhengHei" panose="020B0604030504040204" pitchFamily="34" charset="-120"/>
+                <a:ea typeface="Microsoft JhengHei" panose="020B0604030504040204" pitchFamily="34" charset="-120"/>
               </a:rPr>
-              <a:t>發榮耀的光芒 </a:t>
-            </a:r>
-            <a:endParaRPr lang="en-US" altLang="zh-TW" sz="4800" b="1" dirty="0">
-              <a:latin typeface="Microsoft JhengHei" pitchFamily="34" charset="-120"/>
-              <a:ea typeface="Microsoft JhengHei" pitchFamily="34" charset="-120"/>
-            </a:endParaRPr>
-          </a:p>
-          <a:p>
-            <a:pPr marL="0" indent="0" algn="ctr">
-              <a:buNone/>
-            </a:pPr>
-            <a:r>
-              <a:rPr lang="zh-TW" altLang="en-US" sz="4800" b="1" dirty="0">
-                <a:latin typeface="Microsoft JhengHei" pitchFamily="34" charset="-120"/>
-                <a:ea typeface="Microsoft JhengHei" pitchFamily="34" charset="-120"/>
+              <a:t> 1</a:t>
+            </a:r>
+            <a:r>
+              <a:rPr lang="en-US" sz="2400" b="1" dirty="0">
+                <a:solidFill>
+                  <a:srgbClr val="000066"/>
+                </a:solidFill>
+                <a:latin typeface="Microsoft JhengHei" panose="020B0604030504040204" pitchFamily="34" charset="-120"/>
+                <a:ea typeface="Microsoft JhengHei" panose="020B0604030504040204" pitchFamily="34" charset="-120"/>
               </a:rPr>
-              <a:t>謙</a:t>
-            </a:r>
-            <a:r>
-              <a:rPr lang="zh-TW" altLang="en-US" sz="4800" b="1" dirty="0">
-                <a:latin typeface="Microsoft JhengHei" pitchFamily="34" charset="-120"/>
-                <a:ea typeface="Microsoft JhengHei" pitchFamily="34" charset="-120"/>
-              </a:rPr>
-              <a:t>卑自己 來到你所造之地 </a:t>
-            </a:r>
-            <a:endParaRPr lang="en-US" altLang="zh-TW" sz="4800" b="1" dirty="0">
-              <a:latin typeface="Microsoft JhengHei" pitchFamily="34" charset="-120"/>
-              <a:ea typeface="Microsoft JhengHei" pitchFamily="34" charset="-120"/>
-            </a:endParaRPr>
-          </a:p>
-          <a:p>
-            <a:pPr marL="0" indent="0" algn="ctr">
-              <a:buNone/>
-            </a:pPr>
-            <a:r>
-              <a:rPr lang="zh-TW" altLang="en-US" sz="4800" b="1" dirty="0">
-                <a:latin typeface="Microsoft JhengHei" pitchFamily="34" charset="-120"/>
-                <a:ea typeface="Microsoft JhengHei" pitchFamily="34" charset="-120"/>
-              </a:rPr>
-              <a:t>為</a:t>
-            </a:r>
-            <a:r>
-              <a:rPr lang="zh-TW" altLang="en-US" sz="4800" b="1" dirty="0">
-                <a:latin typeface="Microsoft JhengHei" pitchFamily="34" charset="-120"/>
-                <a:ea typeface="Microsoft JhengHei" pitchFamily="34" charset="-120"/>
-              </a:rPr>
-              <a:t>了愛犧牲自己</a:t>
-            </a:r>
-            <a:endParaRPr lang="en-US" sz="4800" b="1" dirty="0">
-              <a:latin typeface="Microsoft JhengHei" pitchFamily="34" charset="-120"/>
-              <a:ea typeface="Microsoft JhengHei" pitchFamily="34" charset="-120"/>
+              <a:t> )</a:t>
+            </a:r>
+            <a:endParaRPr lang="vi-VN" sz="2400" b="1" dirty="0">
+              <a:solidFill>
+                <a:srgbClr val="000066"/>
+              </a:solidFill>
+              <a:ea typeface="Microsoft JhengHei" panose="020B0604030504040204" pitchFamily="34" charset="-120"/>
             </a:endParaRPr>
           </a:p>
         </p:txBody>
@@ -3524,7 +3468,7 @@
     </p:spTree>
     <p:extLst>
       <p:ext uri="{BB962C8B-B14F-4D97-AF65-F5344CB8AC3E}">
-        <p14:creationId xmlns:p14="http://schemas.microsoft.com/office/powerpoint/2010/main" val="497236073"/>
+        <p14:creationId xmlns:p14="http://schemas.microsoft.com/office/powerpoint/2010/main" val="380913606"/>
       </p:ext>
     </p:extLst>
   </p:cSld>
@@ -3539,7 +3483,13 @@
   <p:cSld>
     <p:spTree>
       <p:nvGrpSpPr>
-        <p:cNvPr id="1" name=""/>
+        <p:cNvPr id="1" name="">
+          <a:extLst>
+            <a:ext uri="{FF2B5EF4-FFF2-40B4-BE49-F238E27FC236}">
+              <a16:creationId xmlns:a16="http://schemas.microsoft.com/office/drawing/2014/main" id="{FFAB60BE-8822-A793-156F-7D8D30479FB3}"/>
+            </a:ext>
+          </a:extLst>
+        </p:cNvPr>
         <p:cNvGrpSpPr/>
         <p:nvPr/>
       </p:nvGrpSpPr>
@@ -3553,139 +3503,127 @@
       </p:grpSpPr>
       <p:sp>
         <p:nvSpPr>
-          <p:cNvPr id="2" name="Title 1"/>
-          <p:cNvSpPr>
-            <a:spLocks noGrp="1"/>
-          </p:cNvSpPr>
-          <p:nvPr>
-            <p:ph type="title"/>
-          </p:nvPr>
-        </p:nvSpPr>
-        <p:spPr/>
-        <p:txBody>
-          <a:bodyPr>
+          <p:cNvPr id="5" name="內容版面配置區 4">
+            <a:extLst>
+              <a:ext uri="{FF2B5EF4-FFF2-40B4-BE49-F238E27FC236}">
+                <a16:creationId xmlns:a16="http://schemas.microsoft.com/office/drawing/2014/main" id="{651D87B4-EA6A-F056-F79F-887710ED8A25}"/>
+              </a:ext>
+            </a:extLst>
+          </p:cNvPr>
+          <p:cNvSpPr>
+            <a:spLocks noGrp="1"/>
+          </p:cNvSpPr>
+          <p:nvPr>
+            <p:ph idx="1"/>
+          </p:nvPr>
+        </p:nvSpPr>
+        <p:spPr>
+          <a:xfrm>
+            <a:off x="0" y="1563639"/>
+            <a:ext cx="9144000" cy="1803647"/>
+          </a:xfrm>
+        </p:spPr>
+        <p:txBody>
+          <a:bodyPr anchor="ctr">
             <a:normAutofit/>
           </a:bodyPr>
           <a:lstStyle/>
           <a:p>
-            <a:r>
-              <a:rPr lang="zh-TW" altLang="en-US" sz="4000" b="1" dirty="0">
-                <a:latin typeface="Microsoft JhengHei" pitchFamily="34" charset="-120"/>
-                <a:ea typeface="Microsoft JhengHei" pitchFamily="34" charset="-120"/>
+            <a:pPr algn="ctr">
+              <a:buNone/>
+            </a:pPr>
+            <a:r>
+              <a:rPr lang="zh-TW" altLang="en-US" sz="4800" b="1" dirty="0">
+                <a:solidFill>
+                  <a:srgbClr val="000066"/>
+                </a:solidFill>
+                <a:latin typeface="微軟正黑體" pitchFamily="34" charset="-120"/>
+                <a:ea typeface="微軟正黑體" pitchFamily="34" charset="-120"/>
               </a:rPr>
-              <a:t>我在這裡敬拜</a:t>
-            </a:r>
-            <a:endParaRPr lang="en-US" sz="4000" b="1" dirty="0">
-              <a:latin typeface="Microsoft JhengHei" pitchFamily="34" charset="-120"/>
-              <a:ea typeface="Microsoft JhengHei" pitchFamily="34" charset="-120"/>
-            </a:endParaRPr>
-          </a:p>
-        </p:txBody>
-      </p:sp>
-      <p:sp>
-        <p:nvSpPr>
-          <p:cNvPr id="3" name="Content Placeholder 2"/>
-          <p:cNvSpPr>
-            <a:spLocks noGrp="1"/>
-          </p:cNvSpPr>
-          <p:nvPr>
-            <p:ph idx="1"/>
-          </p:nvPr>
+              <a:t>我在這裡敬拜  屈膝向祢跪拜 </a:t>
+            </a:r>
+          </a:p>
+          <a:p>
+            <a:pPr algn="ctr">
+              <a:buNone/>
+            </a:pPr>
+            <a:r>
+              <a:rPr lang="zh-TW" altLang="en-US" sz="4800" b="1" dirty="0">
+                <a:solidFill>
+                  <a:srgbClr val="000066"/>
+                </a:solidFill>
+                <a:latin typeface="微軟正黑體" pitchFamily="34" charset="-120"/>
+                <a:ea typeface="微軟正黑體" pitchFamily="34" charset="-120"/>
+              </a:rPr>
+              <a:t>大聲宣告祢是我的神 </a:t>
+            </a:r>
+          </a:p>
+        </p:txBody>
+      </p:sp>
+      <p:sp>
+        <p:nvSpPr>
+          <p:cNvPr id="3" name="TextBox 2">
+            <a:extLst>
+              <a:ext uri="{FF2B5EF4-FFF2-40B4-BE49-F238E27FC236}">
+                <a16:creationId xmlns:a16="http://schemas.microsoft.com/office/drawing/2014/main" id="{CB1B7856-AE61-4BFB-8C8B-3FF110167325}"/>
+              </a:ext>
+            </a:extLst>
+          </p:cNvPr>
+          <p:cNvSpPr txBox="1"/>
+          <p:nvPr/>
         </p:nvSpPr>
         <p:spPr>
           <a:xfrm>
-            <a:off x="0" y="1200151"/>
-            <a:ext cx="9144000" cy="3394472"/>
+            <a:off x="0" y="3867895"/>
+            <a:ext cx="9144000" cy="461665"/>
           </a:xfrm>
+          <a:prstGeom prst="rect">
+            <a:avLst/>
+          </a:prstGeom>
+          <a:noFill/>
         </p:spPr>
         <p:txBody>
-          <a:bodyPr>
-            <a:noAutofit/>
+          <a:bodyPr wrap="square" rtlCol="0">
+            <a:spAutoFit/>
           </a:bodyPr>
           <a:lstStyle/>
           <a:p>
-            <a:pPr marL="0" indent="0" algn="ctr">
-              <a:buNone/>
-            </a:pPr>
-            <a:r>
-              <a:rPr lang="zh-TW" altLang="en-US" sz="4800" b="1" dirty="0">
-                <a:latin typeface="Microsoft JhengHei" pitchFamily="34" charset="-120"/>
-                <a:ea typeface="Microsoft JhengHei" pitchFamily="34" charset="-120"/>
+            <a:pPr algn="ctr"/>
+            <a:r>
+              <a:rPr lang="en-US" sz="2400" b="1" dirty="0">
+                <a:solidFill>
+                  <a:srgbClr val="000066"/>
+                </a:solidFill>
+                <a:latin typeface="Microsoft JhengHei" panose="020B0604030504040204" pitchFamily="34" charset="-120"/>
+                <a:ea typeface="Microsoft JhengHei" panose="020B0604030504040204" pitchFamily="34" charset="-120"/>
               </a:rPr>
-              <a:t>我在這裡敬拜 屈膝向你跪拜 </a:t>
-            </a:r>
-            <a:endParaRPr lang="en-US" altLang="zh-TW" sz="4800" b="1" dirty="0">
-              <a:latin typeface="Microsoft JhengHei" pitchFamily="34" charset="-120"/>
-              <a:ea typeface="Microsoft JhengHei" pitchFamily="34" charset="-120"/>
-            </a:endParaRPr>
-          </a:p>
-          <a:p>
-            <a:pPr marL="0" indent="0" algn="ctr">
-              <a:buNone/>
-            </a:pPr>
-            <a:r>
-              <a:rPr lang="zh-TW" altLang="en-US" sz="4800" b="1" dirty="0">
-                <a:latin typeface="Microsoft JhengHei" pitchFamily="34" charset="-120"/>
-                <a:ea typeface="Microsoft JhengHei" pitchFamily="34" charset="-120"/>
+              <a:t>( </a:t>
+            </a:r>
+            <a:r>
+              <a:rPr lang="zh-CN" altLang="en-US" sz="2400" b="1" dirty="0">
+                <a:solidFill>
+                  <a:srgbClr val="000066"/>
+                </a:solidFill>
+                <a:latin typeface="Microsoft JhengHei" panose="020B0604030504040204" pitchFamily="34" charset="-120"/>
+                <a:ea typeface="Microsoft JhengHei" panose="020B0604030504040204" pitchFamily="34" charset="-120"/>
               </a:rPr>
-              <a:t>大</a:t>
-            </a:r>
-            <a:r>
-              <a:rPr lang="zh-TW" altLang="en-US" sz="4800" b="1" dirty="0">
-                <a:latin typeface="Microsoft JhengHei" pitchFamily="34" charset="-120"/>
-                <a:ea typeface="Microsoft JhengHei" pitchFamily="34" charset="-120"/>
+              <a:t>副歌</a:t>
+            </a:r>
+            <a:r>
+              <a:rPr lang="en-US" sz="2400" b="1" dirty="0">
+                <a:solidFill>
+                  <a:srgbClr val="000066"/>
+                </a:solidFill>
+                <a:latin typeface="Microsoft JhengHei" panose="020B0604030504040204" pitchFamily="34" charset="-120"/>
+                <a:ea typeface="Microsoft JhengHei" panose="020B0604030504040204" pitchFamily="34" charset="-120"/>
               </a:rPr>
-              <a:t>聲宣告你是我的神 </a:t>
-            </a:r>
-            <a:endParaRPr lang="en-US" altLang="zh-TW" sz="4800" b="1" dirty="0">
-              <a:latin typeface="Microsoft JhengHei" pitchFamily="34" charset="-120"/>
-              <a:ea typeface="Microsoft JhengHei" pitchFamily="34" charset="-120"/>
-            </a:endParaRPr>
-          </a:p>
-          <a:p>
-            <a:pPr marL="0" indent="0" algn="ctr">
-              <a:buNone/>
-            </a:pPr>
-            <a:r>
-              <a:rPr lang="zh-TW" altLang="en-US" sz="4800" b="1" dirty="0">
-                <a:latin typeface="Microsoft JhengHei" pitchFamily="34" charset="-120"/>
-                <a:ea typeface="Microsoft JhengHei" pitchFamily="34" charset="-120"/>
-              </a:rPr>
-              <a:t>噢 </a:t>
-            </a:r>
-            <a:r>
-              <a:rPr lang="zh-TW" altLang="en-US" sz="4800" b="1" dirty="0">
-                <a:latin typeface="Microsoft JhengHei" pitchFamily="34" charset="-120"/>
-                <a:ea typeface="Microsoft JhengHei" pitchFamily="34" charset="-120"/>
-              </a:rPr>
-              <a:t>你是如此美好 你是如此配得 </a:t>
-            </a:r>
-            <a:endParaRPr lang="en-US" altLang="zh-TW" sz="4800" b="1" dirty="0">
-              <a:latin typeface="Microsoft JhengHei" pitchFamily="34" charset="-120"/>
-              <a:ea typeface="Microsoft JhengHei" pitchFamily="34" charset="-120"/>
-            </a:endParaRPr>
-          </a:p>
-          <a:p>
-            <a:pPr marL="0" indent="0" algn="ctr">
-              <a:buNone/>
-            </a:pPr>
-            <a:r>
-              <a:rPr lang="zh-TW" altLang="en-US" sz="4800" b="1" dirty="0">
-                <a:latin typeface="Microsoft JhengHei" pitchFamily="34" charset="-120"/>
-                <a:ea typeface="Microsoft JhengHei" pitchFamily="34" charset="-120"/>
-              </a:rPr>
-              <a:t>我</a:t>
-            </a:r>
-            <a:r>
-              <a:rPr lang="zh-TW" altLang="en-US" sz="4800" b="1" dirty="0">
-                <a:latin typeface="Microsoft JhengHei" pitchFamily="34" charset="-120"/>
-                <a:ea typeface="Microsoft JhengHei" pitchFamily="34" charset="-120"/>
-              </a:rPr>
-              <a:t>在這裡敬拜你聖名</a:t>
-            </a:r>
-            <a:endParaRPr lang="en-US" sz="4800" b="1" dirty="0">
-              <a:latin typeface="Microsoft JhengHei" pitchFamily="34" charset="-120"/>
-              <a:ea typeface="Microsoft JhengHei" pitchFamily="34" charset="-120"/>
+              <a:t> )</a:t>
+            </a:r>
+            <a:endParaRPr lang="vi-VN" sz="2400" b="1" dirty="0">
+              <a:solidFill>
+                <a:srgbClr val="000066"/>
+              </a:solidFill>
+              <a:ea typeface="Microsoft JhengHei" panose="020B0604030504040204" pitchFamily="34" charset="-120"/>
             </a:endParaRPr>
           </a:p>
         </p:txBody>
@@ -3693,7 +3631,7 @@
     </p:spTree>
     <p:extLst>
       <p:ext uri="{BB962C8B-B14F-4D97-AF65-F5344CB8AC3E}">
-        <p14:creationId xmlns:p14="http://schemas.microsoft.com/office/powerpoint/2010/main" val="1179813130"/>
+        <p14:creationId xmlns:p14="http://schemas.microsoft.com/office/powerpoint/2010/main" val="3633435192"/>
       </p:ext>
     </p:extLst>
   </p:cSld>
@@ -3708,7 +3646,13 @@
   <p:cSld>
     <p:spTree>
       <p:nvGrpSpPr>
-        <p:cNvPr id="1" name=""/>
+        <p:cNvPr id="1" name="">
+          <a:extLst>
+            <a:ext uri="{FF2B5EF4-FFF2-40B4-BE49-F238E27FC236}">
+              <a16:creationId xmlns:a16="http://schemas.microsoft.com/office/drawing/2014/main" id="{5BB9E1B6-F58A-AA96-5F09-B999C6D55356}"/>
+            </a:ext>
+          </a:extLst>
+        </p:cNvPr>
         <p:cNvGrpSpPr/>
         <p:nvPr/>
       </p:nvGrpSpPr>
@@ -3722,109 +3666,127 @@
       </p:grpSpPr>
       <p:sp>
         <p:nvSpPr>
-          <p:cNvPr id="2" name="Title 1"/>
-          <p:cNvSpPr>
-            <a:spLocks noGrp="1"/>
-          </p:cNvSpPr>
-          <p:nvPr>
-            <p:ph type="title"/>
-          </p:nvPr>
-        </p:nvSpPr>
-        <p:spPr/>
-        <p:txBody>
-          <a:bodyPr>
+          <p:cNvPr id="5" name="內容版面配置區 4">
+            <a:extLst>
+              <a:ext uri="{FF2B5EF4-FFF2-40B4-BE49-F238E27FC236}">
+                <a16:creationId xmlns:a16="http://schemas.microsoft.com/office/drawing/2014/main" id="{C782D706-7C6B-91ED-3D2A-ED911FFF64FF}"/>
+              </a:ext>
+            </a:extLst>
+          </p:cNvPr>
+          <p:cNvSpPr>
+            <a:spLocks noGrp="1"/>
+          </p:cNvSpPr>
+          <p:nvPr>
+            <p:ph idx="1"/>
+          </p:nvPr>
+        </p:nvSpPr>
+        <p:spPr>
+          <a:xfrm>
+            <a:off x="0" y="1563639"/>
+            <a:ext cx="9144000" cy="1803647"/>
+          </a:xfrm>
+        </p:spPr>
+        <p:txBody>
+          <a:bodyPr anchor="ctr">
             <a:normAutofit/>
           </a:bodyPr>
           <a:lstStyle/>
           <a:p>
-            <a:r>
-              <a:rPr lang="zh-TW" altLang="en-US" sz="4000" b="1" dirty="0">
-                <a:latin typeface="Microsoft JhengHei" pitchFamily="34" charset="-120"/>
-                <a:ea typeface="Microsoft JhengHei" pitchFamily="34" charset="-120"/>
+            <a:pPr algn="ctr">
+              <a:buNone/>
+            </a:pPr>
+            <a:r>
+              <a:rPr lang="zh-TW" altLang="en-US" sz="4800" b="1" dirty="0">
+                <a:solidFill>
+                  <a:srgbClr val="000066"/>
+                </a:solidFill>
+                <a:latin typeface="微軟正黑體" pitchFamily="34" charset="-120"/>
+                <a:ea typeface="微軟正黑體" pitchFamily="34" charset="-120"/>
               </a:rPr>
-              <a:t>我在這裡敬拜</a:t>
-            </a:r>
-            <a:endParaRPr lang="en-US" sz="4000" b="1" dirty="0">
-              <a:latin typeface="Microsoft JhengHei" pitchFamily="34" charset="-120"/>
-              <a:ea typeface="Microsoft JhengHei" pitchFamily="34" charset="-120"/>
-            </a:endParaRPr>
-          </a:p>
-        </p:txBody>
-      </p:sp>
-      <p:sp>
-        <p:nvSpPr>
-          <p:cNvPr id="3" name="Content Placeholder 2"/>
-          <p:cNvSpPr>
-            <a:spLocks noGrp="1"/>
-          </p:cNvSpPr>
-          <p:nvPr>
-            <p:ph idx="1"/>
-          </p:nvPr>
+              <a:t>噢  祢是如此美好  祢是如此配得 </a:t>
+            </a:r>
+          </a:p>
+          <a:p>
+            <a:pPr algn="ctr">
+              <a:buNone/>
+            </a:pPr>
+            <a:r>
+              <a:rPr lang="zh-TW" altLang="en-US" sz="4800" b="1" dirty="0">
+                <a:solidFill>
+                  <a:srgbClr val="000066"/>
+                </a:solidFill>
+                <a:latin typeface="微軟正黑體" pitchFamily="34" charset="-120"/>
+                <a:ea typeface="微軟正黑體" pitchFamily="34" charset="-120"/>
+              </a:rPr>
+              <a:t>我在這裡敬拜祢聖名</a:t>
+            </a:r>
+          </a:p>
+        </p:txBody>
+      </p:sp>
+      <p:sp>
+        <p:nvSpPr>
+          <p:cNvPr id="3" name="TextBox 2">
+            <a:extLst>
+              <a:ext uri="{FF2B5EF4-FFF2-40B4-BE49-F238E27FC236}">
+                <a16:creationId xmlns:a16="http://schemas.microsoft.com/office/drawing/2014/main" id="{8211A426-C954-431D-5153-7FB648941062}"/>
+              </a:ext>
+            </a:extLst>
+          </p:cNvPr>
+          <p:cNvSpPr txBox="1"/>
+          <p:nvPr/>
         </p:nvSpPr>
         <p:spPr>
           <a:xfrm>
-            <a:off x="0" y="1200151"/>
-            <a:ext cx="9144000" cy="3394472"/>
+            <a:off x="0" y="3867895"/>
+            <a:ext cx="9144000" cy="461665"/>
           </a:xfrm>
+          <a:prstGeom prst="rect">
+            <a:avLst/>
+          </a:prstGeom>
+          <a:noFill/>
         </p:spPr>
         <p:txBody>
-          <a:bodyPr>
-            <a:noAutofit/>
+          <a:bodyPr wrap="square" rtlCol="0">
+            <a:spAutoFit/>
           </a:bodyPr>
           <a:lstStyle/>
           <a:p>
-            <a:pPr marL="0" indent="0" algn="ctr">
-              <a:buNone/>
-            </a:pPr>
-            <a:r>
-              <a:rPr lang="zh-TW" altLang="en-US" sz="4800" b="1" dirty="0">
-                <a:latin typeface="Microsoft JhengHei" pitchFamily="34" charset="-120"/>
-                <a:ea typeface="Microsoft JhengHei" pitchFamily="34" charset="-120"/>
+            <a:pPr algn="ctr"/>
+            <a:r>
+              <a:rPr lang="en-US" sz="2400" b="1" dirty="0">
+                <a:solidFill>
+                  <a:srgbClr val="000066"/>
+                </a:solidFill>
+                <a:latin typeface="Microsoft JhengHei" panose="020B0604030504040204" pitchFamily="34" charset="-120"/>
+                <a:ea typeface="Microsoft JhengHei" panose="020B0604030504040204" pitchFamily="34" charset="-120"/>
               </a:rPr>
-              <a:t>我不知道多少代價 </a:t>
-            </a:r>
-            <a:endParaRPr lang="en-US" altLang="zh-TW" sz="4800" b="1" dirty="0">
-              <a:latin typeface="Microsoft JhengHei" pitchFamily="34" charset="-120"/>
-              <a:ea typeface="Microsoft JhengHei" pitchFamily="34" charset="-120"/>
-            </a:endParaRPr>
-          </a:p>
-          <a:p>
-            <a:pPr marL="0" indent="0" algn="ctr">
-              <a:buNone/>
-            </a:pPr>
-            <a:r>
-              <a:rPr lang="zh-TW" altLang="en-US" sz="4800" b="1" dirty="0">
-                <a:latin typeface="Microsoft JhengHei" pitchFamily="34" charset="-120"/>
-                <a:ea typeface="Microsoft JhengHei" pitchFamily="34" charset="-120"/>
+              <a:t>( </a:t>
+            </a:r>
+            <a:r>
+              <a:rPr lang="zh-CN" altLang="en-US" sz="2400" b="1" dirty="0">
+                <a:solidFill>
+                  <a:srgbClr val="000066"/>
+                </a:solidFill>
+                <a:latin typeface="Microsoft JhengHei" panose="020B0604030504040204" pitchFamily="34" charset="-120"/>
+                <a:ea typeface="Microsoft JhengHei" panose="020B0604030504040204" pitchFamily="34" charset="-120"/>
               </a:rPr>
-              <a:t>能</a:t>
-            </a:r>
-            <a:r>
-              <a:rPr lang="zh-TW" altLang="en-US" sz="4800" b="1" dirty="0">
-                <a:latin typeface="Microsoft JhengHei" pitchFamily="34" charset="-120"/>
-                <a:ea typeface="Microsoft JhengHei" pitchFamily="34" charset="-120"/>
+              <a:t>副歌</a:t>
+            </a:r>
+            <a:r>
+              <a:rPr lang="en-US" sz="2400" b="1" dirty="0">
+                <a:solidFill>
+                  <a:srgbClr val="000066"/>
+                </a:solidFill>
+                <a:latin typeface="Microsoft JhengHei" panose="020B0604030504040204" pitchFamily="34" charset="-120"/>
+                <a:ea typeface="Microsoft JhengHei" panose="020B0604030504040204" pitchFamily="34" charset="-120"/>
               </a:rPr>
-              <a:t>使我罪釘上十架 </a:t>
-            </a:r>
-            <a:endParaRPr lang="en-US" altLang="zh-TW" sz="4800" b="1" dirty="0">
-              <a:latin typeface="Microsoft JhengHei" pitchFamily="34" charset="-120"/>
-              <a:ea typeface="Microsoft JhengHei" pitchFamily="34" charset="-120"/>
-            </a:endParaRPr>
-          </a:p>
-          <a:p>
-            <a:pPr marL="0" indent="0" algn="ctr">
-              <a:buNone/>
-            </a:pPr>
-            <a:r>
-              <a:rPr lang="en-US" altLang="zh-TW" sz="3600" b="1" dirty="0" smtClean="0">
-                <a:latin typeface="Microsoft JhengHei" pitchFamily="34" charset="-120"/>
-                <a:ea typeface="Microsoft JhengHei" pitchFamily="34" charset="-120"/>
-              </a:rPr>
-              <a:t>(x2)</a:t>
-            </a:r>
-            <a:endParaRPr lang="en-US" sz="3600" b="1" dirty="0">
-              <a:latin typeface="Microsoft JhengHei" pitchFamily="34" charset="-120"/>
-              <a:ea typeface="Microsoft JhengHei" pitchFamily="34" charset="-120"/>
+              <a:t> )</a:t>
+            </a:r>
+            <a:endParaRPr lang="vi-VN" sz="2400" b="1" dirty="0">
+              <a:solidFill>
+                <a:srgbClr val="000066"/>
+              </a:solidFill>
+              <a:ea typeface="Microsoft JhengHei" panose="020B0604030504040204" pitchFamily="34" charset="-120"/>
             </a:endParaRPr>
           </a:p>
         </p:txBody>
@@ -3832,7 +3794,7 @@
     </p:spTree>
     <p:extLst>
       <p:ext uri="{BB962C8B-B14F-4D97-AF65-F5344CB8AC3E}">
-        <p14:creationId xmlns:p14="http://schemas.microsoft.com/office/powerpoint/2010/main" val="1223618469"/>
+        <p14:creationId xmlns:p14="http://schemas.microsoft.com/office/powerpoint/2010/main" val="3725474155"/>
       </p:ext>
     </p:extLst>
   </p:cSld>
@@ -3847,7 +3809,13 @@
   <p:cSld>
     <p:spTree>
       <p:nvGrpSpPr>
-        <p:cNvPr id="1" name=""/>
+        <p:cNvPr id="1" name="">
+          <a:extLst>
+            <a:ext uri="{FF2B5EF4-FFF2-40B4-BE49-F238E27FC236}">
+              <a16:creationId xmlns:a16="http://schemas.microsoft.com/office/drawing/2014/main" id="{F13AC1A5-EAF8-A70C-2F63-0CDCA466908B}"/>
+            </a:ext>
+          </a:extLst>
+        </p:cNvPr>
         <p:cNvGrpSpPr/>
         <p:nvPr/>
       </p:nvGrpSpPr>
@@ -3861,139 +3829,137 @@
       </p:grpSpPr>
       <p:sp>
         <p:nvSpPr>
-          <p:cNvPr id="2" name="Title 1"/>
-          <p:cNvSpPr>
-            <a:spLocks noGrp="1"/>
-          </p:cNvSpPr>
-          <p:nvPr>
-            <p:ph type="title"/>
-          </p:nvPr>
-        </p:nvSpPr>
-        <p:spPr/>
-        <p:txBody>
-          <a:bodyPr>
+          <p:cNvPr id="5" name="內容版面配置區 4">
+            <a:extLst>
+              <a:ext uri="{FF2B5EF4-FFF2-40B4-BE49-F238E27FC236}">
+                <a16:creationId xmlns:a16="http://schemas.microsoft.com/office/drawing/2014/main" id="{B9C66419-8ACE-D5FE-948C-A3BFFCE09362}"/>
+              </a:ext>
+            </a:extLst>
+          </p:cNvPr>
+          <p:cNvSpPr>
+            <a:spLocks noGrp="1"/>
+          </p:cNvSpPr>
+          <p:nvPr>
+            <p:ph idx="1"/>
+          </p:nvPr>
+        </p:nvSpPr>
+        <p:spPr>
+          <a:xfrm>
+            <a:off x="0" y="1563639"/>
+            <a:ext cx="9144000" cy="1803647"/>
+          </a:xfrm>
+        </p:spPr>
+        <p:txBody>
+          <a:bodyPr anchor="ctr">
             <a:normAutofit/>
           </a:bodyPr>
           <a:lstStyle/>
           <a:p>
-            <a:r>
-              <a:rPr lang="zh-TW" altLang="en-US" sz="4000" b="1" dirty="0">
-                <a:latin typeface="Microsoft JhengHei" pitchFamily="34" charset="-120"/>
-                <a:ea typeface="Microsoft JhengHei" pitchFamily="34" charset="-120"/>
+            <a:pPr algn="ctr">
+              <a:buNone/>
+            </a:pPr>
+            <a:r>
+              <a:rPr lang="zh-TW" altLang="en-US" sz="4800" b="1" dirty="0">
+                <a:solidFill>
+                  <a:srgbClr val="000066"/>
+                </a:solidFill>
+                <a:latin typeface="微軟正黑體" pitchFamily="34" charset="-120"/>
+                <a:ea typeface="微軟正黑體" pitchFamily="34" charset="-120"/>
               </a:rPr>
-              <a:t>我在這裡敬拜</a:t>
-            </a:r>
-            <a:endParaRPr lang="en-US" sz="4000" b="1" dirty="0">
-              <a:latin typeface="Microsoft JhengHei" pitchFamily="34" charset="-120"/>
-              <a:ea typeface="Microsoft JhengHei" pitchFamily="34" charset="-120"/>
-            </a:endParaRPr>
-          </a:p>
-        </p:txBody>
-      </p:sp>
-      <p:sp>
-        <p:nvSpPr>
-          <p:cNvPr id="3" name="Content Placeholder 2"/>
-          <p:cNvSpPr>
-            <a:spLocks noGrp="1"/>
-          </p:cNvSpPr>
-          <p:nvPr>
-            <p:ph idx="1"/>
-          </p:nvPr>
+              <a:t>萬王之王  坐在至高寶座上 </a:t>
+            </a:r>
+          </a:p>
+          <a:p>
+            <a:pPr algn="ctr">
+              <a:buNone/>
+            </a:pPr>
+            <a:r>
+              <a:rPr lang="zh-TW" altLang="en-US" sz="4800" b="1" dirty="0">
+                <a:solidFill>
+                  <a:srgbClr val="000066"/>
+                </a:solidFill>
+                <a:latin typeface="微軟正黑體" pitchFamily="34" charset="-120"/>
+                <a:ea typeface="微軟正黑體" pitchFamily="34" charset="-120"/>
+              </a:rPr>
+              <a:t>散發榮耀的光芒 </a:t>
+            </a:r>
+          </a:p>
+        </p:txBody>
+      </p:sp>
+      <p:sp>
+        <p:nvSpPr>
+          <p:cNvPr id="3" name="TextBox 2">
+            <a:extLst>
+              <a:ext uri="{FF2B5EF4-FFF2-40B4-BE49-F238E27FC236}">
+                <a16:creationId xmlns:a16="http://schemas.microsoft.com/office/drawing/2014/main" id="{39859F13-CE4C-DFCC-61C5-CB91A234806B}"/>
+              </a:ext>
+            </a:extLst>
+          </p:cNvPr>
+          <p:cNvSpPr txBox="1"/>
+          <p:nvPr/>
         </p:nvSpPr>
         <p:spPr>
           <a:xfrm>
-            <a:off x="0" y="1200151"/>
-            <a:ext cx="9144000" cy="3394472"/>
+            <a:off x="0" y="3867895"/>
+            <a:ext cx="9144000" cy="461665"/>
           </a:xfrm>
+          <a:prstGeom prst="rect">
+            <a:avLst/>
+          </a:prstGeom>
+          <a:noFill/>
         </p:spPr>
         <p:txBody>
-          <a:bodyPr>
-            <a:noAutofit/>
+          <a:bodyPr wrap="square" rtlCol="0">
+            <a:spAutoFit/>
           </a:bodyPr>
           <a:lstStyle/>
           <a:p>
-            <a:pPr marL="0" indent="0" algn="ctr">
-              <a:buNone/>
-            </a:pPr>
-            <a:r>
-              <a:rPr lang="zh-TW" altLang="en-US" sz="4800" b="1" dirty="0">
-                <a:latin typeface="Microsoft JhengHei" pitchFamily="34" charset="-120"/>
-                <a:ea typeface="Microsoft JhengHei" pitchFamily="34" charset="-120"/>
+            <a:pPr algn="ctr"/>
+            <a:r>
+              <a:rPr lang="en-US" sz="2400" b="1" dirty="0">
+                <a:solidFill>
+                  <a:srgbClr val="000066"/>
+                </a:solidFill>
+                <a:latin typeface="Microsoft JhengHei" panose="020B0604030504040204" pitchFamily="34" charset="-120"/>
+                <a:ea typeface="Microsoft JhengHei" panose="020B0604030504040204" pitchFamily="34" charset="-120"/>
               </a:rPr>
-              <a:t>我在這裡敬拜 屈膝向你跪拜 </a:t>
-            </a:r>
-            <a:endParaRPr lang="en-US" altLang="zh-TW" sz="4800" b="1" dirty="0">
-              <a:latin typeface="Microsoft JhengHei" pitchFamily="34" charset="-120"/>
-              <a:ea typeface="Microsoft JhengHei" pitchFamily="34" charset="-120"/>
-            </a:endParaRPr>
-          </a:p>
-          <a:p>
-            <a:pPr marL="0" indent="0" algn="ctr">
-              <a:buNone/>
-            </a:pPr>
-            <a:r>
-              <a:rPr lang="zh-TW" altLang="en-US" sz="4800" b="1" dirty="0">
-                <a:latin typeface="Microsoft JhengHei" pitchFamily="34" charset="-120"/>
-                <a:ea typeface="Microsoft JhengHei" pitchFamily="34" charset="-120"/>
+              <a:t>( </a:t>
+            </a:r>
+            <a:r>
+              <a:rPr lang="zh-CN" altLang="en-US" sz="2400" b="1" dirty="0">
+                <a:solidFill>
+                  <a:srgbClr val="000066"/>
+                </a:solidFill>
+                <a:latin typeface="Microsoft JhengHei" panose="020B0604030504040204" pitchFamily="34" charset="-120"/>
+                <a:ea typeface="Microsoft JhengHei" panose="020B0604030504040204" pitchFamily="34" charset="-120"/>
               </a:rPr>
-              <a:t>大</a:t>
-            </a:r>
-            <a:r>
-              <a:rPr lang="zh-TW" altLang="en-US" sz="4800" b="1" dirty="0">
-                <a:latin typeface="Microsoft JhengHei" pitchFamily="34" charset="-120"/>
-                <a:ea typeface="Microsoft JhengHei" pitchFamily="34" charset="-120"/>
+              <a:t>正歌</a:t>
+            </a:r>
+            <a:r>
+              <a:rPr lang="en-US" altLang="zh-CN" sz="2400" b="1" dirty="0">
+                <a:solidFill>
+                  <a:srgbClr val="000066"/>
+                </a:solidFill>
+                <a:latin typeface="Microsoft JhengHei" panose="020B0604030504040204" pitchFamily="34" charset="-120"/>
+                <a:ea typeface="Microsoft JhengHei" panose="020B0604030504040204" pitchFamily="34" charset="-120"/>
               </a:rPr>
-              <a:t>聲宣告你是我的神 </a:t>
-            </a:r>
-            <a:endParaRPr lang="en-US" altLang="zh-TW" sz="4800" b="1" dirty="0">
-              <a:latin typeface="Microsoft JhengHei" pitchFamily="34" charset="-120"/>
-              <a:ea typeface="Microsoft JhengHei" pitchFamily="34" charset="-120"/>
-            </a:endParaRPr>
-          </a:p>
-          <a:p>
-            <a:pPr marL="0" indent="0" algn="ctr">
-              <a:buNone/>
-            </a:pPr>
-            <a:r>
-              <a:rPr lang="zh-TW" altLang="en-US" sz="4800" b="1" dirty="0">
-                <a:latin typeface="Microsoft JhengHei" pitchFamily="34" charset="-120"/>
-                <a:ea typeface="Microsoft JhengHei" pitchFamily="34" charset="-120"/>
+              <a:t> 2</a:t>
+            </a:r>
+            <a:r>
+              <a:rPr lang="en-US" sz="2400" b="1" dirty="0">
+                <a:solidFill>
+                  <a:srgbClr val="000066"/>
+                </a:solidFill>
+                <a:latin typeface="Microsoft JhengHei" panose="020B0604030504040204" pitchFamily="34" charset="-120"/>
+                <a:ea typeface="Microsoft JhengHei" panose="020B0604030504040204" pitchFamily="34" charset="-120"/>
               </a:rPr>
-              <a:t>噢 </a:t>
-            </a:r>
-            <a:r>
-              <a:rPr lang="zh-TW" altLang="en-US" sz="4800" b="1" dirty="0">
-                <a:latin typeface="Microsoft JhengHei" pitchFamily="34" charset="-120"/>
-                <a:ea typeface="Microsoft JhengHei" pitchFamily="34" charset="-120"/>
-              </a:rPr>
-              <a:t>你是如此美好 你是如此配得 </a:t>
-            </a:r>
-            <a:endParaRPr lang="en-US" altLang="zh-TW" sz="4800" b="1" dirty="0">
-              <a:latin typeface="Microsoft JhengHei" pitchFamily="34" charset="-120"/>
-              <a:ea typeface="Microsoft JhengHei" pitchFamily="34" charset="-120"/>
-            </a:endParaRPr>
-          </a:p>
-          <a:p>
-            <a:pPr marL="0" indent="0" algn="ctr">
-              <a:buNone/>
-            </a:pPr>
-            <a:r>
-              <a:rPr lang="zh-TW" altLang="en-US" sz="4800" b="1" dirty="0">
-                <a:latin typeface="Microsoft JhengHei" pitchFamily="34" charset="-120"/>
-                <a:ea typeface="Microsoft JhengHei" pitchFamily="34" charset="-120"/>
-              </a:rPr>
-              <a:t>我</a:t>
-            </a:r>
-            <a:r>
-              <a:rPr lang="zh-TW" altLang="en-US" sz="4800" b="1" dirty="0">
-                <a:latin typeface="Microsoft JhengHei" pitchFamily="34" charset="-120"/>
-                <a:ea typeface="Microsoft JhengHei" pitchFamily="34" charset="-120"/>
-              </a:rPr>
-              <a:t>在這裡敬拜你聖名</a:t>
-            </a:r>
-            <a:endParaRPr lang="en-US" sz="4800" b="1" dirty="0">
-              <a:latin typeface="Microsoft JhengHei" pitchFamily="34" charset="-120"/>
-              <a:ea typeface="Microsoft JhengHei" pitchFamily="34" charset="-120"/>
+              <a:t> )</a:t>
+            </a:r>
+            <a:endParaRPr lang="vi-VN" sz="2400" b="1" dirty="0">
+              <a:solidFill>
+                <a:srgbClr val="000066"/>
+              </a:solidFill>
+              <a:ea typeface="Microsoft JhengHei" panose="020B0604030504040204" pitchFamily="34" charset="-120"/>
             </a:endParaRPr>
           </a:p>
         </p:txBody>
@@ -4001,7 +3967,383 @@
     </p:spTree>
     <p:extLst>
       <p:ext uri="{BB962C8B-B14F-4D97-AF65-F5344CB8AC3E}">
-        <p14:creationId xmlns:p14="http://schemas.microsoft.com/office/powerpoint/2010/main" val="4270218200"/>
+        <p14:creationId xmlns:p14="http://schemas.microsoft.com/office/powerpoint/2010/main" val="4293788796"/>
+      </p:ext>
+    </p:extLst>
+  </p:cSld>
+  <p:clrMapOvr>
+    <a:masterClrMapping/>
+  </p:clrMapOvr>
+</p:sld>
+</file>
+
+<file path=ppt/slides/slide7.xml><?xml version="1.0" encoding="utf-8"?>
+<p:sld xmlns:a="http://schemas.openxmlformats.org/drawingml/2006/main" xmlns:r="http://schemas.openxmlformats.org/officeDocument/2006/relationships" xmlns:p="http://schemas.openxmlformats.org/presentationml/2006/main">
+  <p:cSld>
+    <p:spTree>
+      <p:nvGrpSpPr>
+        <p:cNvPr id="1" name="">
+          <a:extLst>
+            <a:ext uri="{FF2B5EF4-FFF2-40B4-BE49-F238E27FC236}">
+              <a16:creationId xmlns:a16="http://schemas.microsoft.com/office/drawing/2014/main" id="{19AA8940-44DB-2600-FF7E-837B93830015}"/>
+            </a:ext>
+          </a:extLst>
+        </p:cNvPr>
+        <p:cNvGrpSpPr/>
+        <p:nvPr/>
+      </p:nvGrpSpPr>
+      <p:grpSpPr>
+        <a:xfrm>
+          <a:off x="0" y="0"/>
+          <a:ext cx="0" cy="0"/>
+          <a:chOff x="0" y="0"/>
+          <a:chExt cx="0" cy="0"/>
+        </a:xfrm>
+      </p:grpSpPr>
+      <p:sp>
+        <p:nvSpPr>
+          <p:cNvPr id="5" name="內容版面配置區 4">
+            <a:extLst>
+              <a:ext uri="{FF2B5EF4-FFF2-40B4-BE49-F238E27FC236}">
+                <a16:creationId xmlns:a16="http://schemas.microsoft.com/office/drawing/2014/main" id="{DD58FC7D-169E-A26D-BAF7-1A59D78E1309}"/>
+              </a:ext>
+            </a:extLst>
+          </p:cNvPr>
+          <p:cNvSpPr>
+            <a:spLocks noGrp="1"/>
+          </p:cNvSpPr>
+          <p:nvPr>
+            <p:ph idx="1"/>
+          </p:nvPr>
+        </p:nvSpPr>
+        <p:spPr>
+          <a:xfrm>
+            <a:off x="0" y="1563639"/>
+            <a:ext cx="9144000" cy="1803647"/>
+          </a:xfrm>
+        </p:spPr>
+        <p:txBody>
+          <a:bodyPr anchor="ctr">
+            <a:normAutofit/>
+          </a:bodyPr>
+          <a:lstStyle/>
+          <a:p>
+            <a:pPr algn="ctr">
+              <a:buNone/>
+            </a:pPr>
+            <a:r>
+              <a:rPr lang="zh-TW" altLang="en-US" sz="4800" b="1" dirty="0">
+                <a:solidFill>
+                  <a:srgbClr val="000066"/>
+                </a:solidFill>
+                <a:latin typeface="微軟正黑體" pitchFamily="34" charset="-120"/>
+                <a:ea typeface="微軟正黑體" pitchFamily="34" charset="-120"/>
+              </a:rPr>
+              <a:t>謙卑自己  來到祢所造之地 </a:t>
+            </a:r>
+          </a:p>
+          <a:p>
+            <a:pPr algn="ctr">
+              <a:buNone/>
+            </a:pPr>
+            <a:r>
+              <a:rPr lang="zh-TW" altLang="en-US" sz="4800" b="1" dirty="0">
+                <a:solidFill>
+                  <a:srgbClr val="000066"/>
+                </a:solidFill>
+                <a:latin typeface="微軟正黑體" pitchFamily="34" charset="-120"/>
+                <a:ea typeface="微軟正黑體" pitchFamily="34" charset="-120"/>
+              </a:rPr>
+              <a:t>為了愛犧牲自己</a:t>
+            </a:r>
+          </a:p>
+        </p:txBody>
+      </p:sp>
+      <p:sp>
+        <p:nvSpPr>
+          <p:cNvPr id="3" name="TextBox 2">
+            <a:extLst>
+              <a:ext uri="{FF2B5EF4-FFF2-40B4-BE49-F238E27FC236}">
+                <a16:creationId xmlns:a16="http://schemas.microsoft.com/office/drawing/2014/main" id="{5CFBC1C7-B446-68CA-97AD-6D0C021B97F7}"/>
+              </a:ext>
+            </a:extLst>
+          </p:cNvPr>
+          <p:cNvSpPr txBox="1"/>
+          <p:nvPr/>
+        </p:nvSpPr>
+        <p:spPr>
+          <a:xfrm>
+            <a:off x="0" y="3867895"/>
+            <a:ext cx="9144000" cy="461665"/>
+          </a:xfrm>
+          <a:prstGeom prst="rect">
+            <a:avLst/>
+          </a:prstGeom>
+          <a:noFill/>
+        </p:spPr>
+        <p:txBody>
+          <a:bodyPr wrap="square" rtlCol="0">
+            <a:spAutoFit/>
+          </a:bodyPr>
+          <a:lstStyle/>
+          <a:p>
+            <a:pPr algn="ctr"/>
+            <a:r>
+              <a:rPr lang="en-US" sz="2400" b="1" dirty="0">
+                <a:solidFill>
+                  <a:srgbClr val="000066"/>
+                </a:solidFill>
+                <a:latin typeface="Microsoft JhengHei" panose="020B0604030504040204" pitchFamily="34" charset="-120"/>
+                <a:ea typeface="Microsoft JhengHei" panose="020B0604030504040204" pitchFamily="34" charset="-120"/>
+              </a:rPr>
+              <a:t>( </a:t>
+            </a:r>
+            <a:r>
+              <a:rPr lang="zh-CN" altLang="en-US" sz="2400" b="1" dirty="0">
+                <a:solidFill>
+                  <a:srgbClr val="000066"/>
+                </a:solidFill>
+                <a:latin typeface="Microsoft JhengHei" panose="020B0604030504040204" pitchFamily="34" charset="-120"/>
+                <a:ea typeface="Microsoft JhengHei" panose="020B0604030504040204" pitchFamily="34" charset="-120"/>
+              </a:rPr>
+              <a:t>正歌</a:t>
+            </a:r>
+            <a:r>
+              <a:rPr lang="en-US" altLang="zh-CN" sz="2400" b="1" dirty="0">
+                <a:solidFill>
+                  <a:srgbClr val="000066"/>
+                </a:solidFill>
+                <a:latin typeface="Microsoft JhengHei" panose="020B0604030504040204" pitchFamily="34" charset="-120"/>
+                <a:ea typeface="Microsoft JhengHei" panose="020B0604030504040204" pitchFamily="34" charset="-120"/>
+              </a:rPr>
+              <a:t> 2</a:t>
+            </a:r>
+            <a:r>
+              <a:rPr lang="en-US" sz="2400" b="1" dirty="0">
+                <a:solidFill>
+                  <a:srgbClr val="000066"/>
+                </a:solidFill>
+                <a:latin typeface="Microsoft JhengHei" panose="020B0604030504040204" pitchFamily="34" charset="-120"/>
+                <a:ea typeface="Microsoft JhengHei" panose="020B0604030504040204" pitchFamily="34" charset="-120"/>
+              </a:rPr>
+              <a:t> )</a:t>
+            </a:r>
+            <a:endParaRPr lang="vi-VN" sz="2400" b="1" dirty="0">
+              <a:solidFill>
+                <a:srgbClr val="000066"/>
+              </a:solidFill>
+              <a:ea typeface="Microsoft JhengHei" panose="020B0604030504040204" pitchFamily="34" charset="-120"/>
+            </a:endParaRPr>
+          </a:p>
+        </p:txBody>
+      </p:sp>
+    </p:spTree>
+    <p:extLst>
+      <p:ext uri="{BB962C8B-B14F-4D97-AF65-F5344CB8AC3E}">
+        <p14:creationId xmlns:p14="http://schemas.microsoft.com/office/powerpoint/2010/main" val="840513032"/>
+      </p:ext>
+    </p:extLst>
+  </p:cSld>
+  <p:clrMapOvr>
+    <a:masterClrMapping/>
+  </p:clrMapOvr>
+</p:sld>
+</file>
+
+<file path=ppt/slides/slide8.xml><?xml version="1.0" encoding="utf-8"?>
+<p:sld xmlns:a="http://schemas.openxmlformats.org/drawingml/2006/main" xmlns:r="http://schemas.openxmlformats.org/officeDocument/2006/relationships" xmlns:p="http://schemas.openxmlformats.org/presentationml/2006/main">
+  <p:cSld>
+    <p:spTree>
+      <p:nvGrpSpPr>
+        <p:cNvPr id="1" name="">
+          <a:extLst>
+            <a:ext uri="{FF2B5EF4-FFF2-40B4-BE49-F238E27FC236}">
+              <a16:creationId xmlns:a16="http://schemas.microsoft.com/office/drawing/2014/main" id="{64EE2934-53C3-5AF0-BC8A-1AA3660DC535}"/>
+            </a:ext>
+          </a:extLst>
+        </p:cNvPr>
+        <p:cNvGrpSpPr/>
+        <p:nvPr/>
+      </p:nvGrpSpPr>
+      <p:grpSpPr>
+        <a:xfrm>
+          <a:off x="0" y="0"/>
+          <a:ext cx="0" cy="0"/>
+          <a:chOff x="0" y="0"/>
+          <a:chExt cx="0" cy="0"/>
+        </a:xfrm>
+      </p:grpSpPr>
+      <p:sp>
+        <p:nvSpPr>
+          <p:cNvPr id="5" name="內容版面配置區 4">
+            <a:extLst>
+              <a:ext uri="{FF2B5EF4-FFF2-40B4-BE49-F238E27FC236}">
+                <a16:creationId xmlns:a16="http://schemas.microsoft.com/office/drawing/2014/main" id="{EA92F302-8D41-D432-06CC-F468B6C7E73C}"/>
+              </a:ext>
+            </a:extLst>
+          </p:cNvPr>
+          <p:cNvSpPr>
+            <a:spLocks noGrp="1"/>
+          </p:cNvSpPr>
+          <p:nvPr>
+            <p:ph idx="1"/>
+          </p:nvPr>
+        </p:nvSpPr>
+        <p:spPr>
+          <a:xfrm>
+            <a:off x="0" y="1563639"/>
+            <a:ext cx="9144000" cy="1803647"/>
+          </a:xfrm>
+        </p:spPr>
+        <p:txBody>
+          <a:bodyPr anchor="ctr">
+            <a:normAutofit/>
+          </a:bodyPr>
+          <a:lstStyle/>
+          <a:p>
+            <a:pPr algn="ctr">
+              <a:buNone/>
+            </a:pPr>
+            <a:r>
+              <a:rPr lang="zh-TW" altLang="en-US" sz="4800" b="1" dirty="0">
+                <a:solidFill>
+                  <a:srgbClr val="000066"/>
+                </a:solidFill>
+                <a:latin typeface="微軟正黑體" pitchFamily="34" charset="-120"/>
+                <a:ea typeface="微軟正黑體" pitchFamily="34" charset="-120"/>
+              </a:rPr>
+              <a:t>我不知道多少代價 </a:t>
+            </a:r>
+          </a:p>
+          <a:p>
+            <a:pPr algn="ctr">
+              <a:buNone/>
+            </a:pPr>
+            <a:r>
+              <a:rPr lang="zh-TW" altLang="en-US" sz="4800" b="1" dirty="0">
+                <a:solidFill>
+                  <a:srgbClr val="000066"/>
+                </a:solidFill>
+                <a:latin typeface="微軟正黑體" pitchFamily="34" charset="-120"/>
+                <a:ea typeface="微軟正黑體" pitchFamily="34" charset="-120"/>
+              </a:rPr>
+              <a:t>能使我罪釘上十架</a:t>
+            </a:r>
+          </a:p>
+        </p:txBody>
+      </p:sp>
+      <p:sp>
+        <p:nvSpPr>
+          <p:cNvPr id="3" name="TextBox 2">
+            <a:extLst>
+              <a:ext uri="{FF2B5EF4-FFF2-40B4-BE49-F238E27FC236}">
+                <a16:creationId xmlns:a16="http://schemas.microsoft.com/office/drawing/2014/main" id="{D5F80427-3AE1-01F9-F2E4-A679C0B8681D}"/>
+              </a:ext>
+            </a:extLst>
+          </p:cNvPr>
+          <p:cNvSpPr txBox="1"/>
+          <p:nvPr/>
+        </p:nvSpPr>
+        <p:spPr>
+          <a:xfrm>
+            <a:off x="0" y="3867895"/>
+            <a:ext cx="9144000" cy="461665"/>
+          </a:xfrm>
+          <a:prstGeom prst="rect">
+            <a:avLst/>
+          </a:prstGeom>
+          <a:noFill/>
+        </p:spPr>
+        <p:txBody>
+          <a:bodyPr wrap="square" rtlCol="0">
+            <a:spAutoFit/>
+          </a:bodyPr>
+          <a:lstStyle/>
+          <a:p>
+            <a:pPr algn="ctr"/>
+            <a:r>
+              <a:rPr lang="en-US" sz="2400" b="1" dirty="0">
+                <a:solidFill>
+                  <a:srgbClr val="000066"/>
+                </a:solidFill>
+                <a:latin typeface="Microsoft JhengHei" panose="020B0604030504040204" pitchFamily="34" charset="-120"/>
+                <a:ea typeface="Microsoft JhengHei" panose="020B0604030504040204" pitchFamily="34" charset="-120"/>
+              </a:rPr>
+              <a:t>( </a:t>
+            </a:r>
+            <a:r>
+              <a:rPr lang="zh-CN" altLang="en-US" sz="2400" b="1" dirty="0">
+                <a:solidFill>
+                  <a:srgbClr val="000066"/>
+                </a:solidFill>
+                <a:latin typeface="Microsoft JhengHei" panose="020B0604030504040204" pitchFamily="34" charset="-120"/>
+                <a:ea typeface="Microsoft JhengHei" panose="020B0604030504040204" pitchFamily="34" charset="-120"/>
+              </a:rPr>
+              <a:t>橋</a:t>
+            </a:r>
+            <a:r>
+              <a:rPr lang="en-US" altLang="zh-CN" sz="2400" b="1" dirty="0">
+                <a:solidFill>
+                  <a:srgbClr val="000066"/>
+                </a:solidFill>
+                <a:latin typeface="Microsoft JhengHei" panose="020B0604030504040204" pitchFamily="34" charset="-120"/>
+                <a:ea typeface="Microsoft JhengHei" panose="020B0604030504040204" pitchFamily="34" charset="-120"/>
+              </a:rPr>
+              <a:t> </a:t>
+            </a:r>
+            <a:r>
+              <a:rPr lang="en-US" sz="2400" b="1" dirty="0">
+                <a:solidFill>
+                  <a:srgbClr val="000066"/>
+                </a:solidFill>
+                <a:latin typeface="Microsoft JhengHei" panose="020B0604030504040204" pitchFamily="34" charset="-120"/>
+                <a:ea typeface="Microsoft JhengHei" panose="020B0604030504040204" pitchFamily="34" charset="-120"/>
+              </a:rPr>
+              <a:t>)</a:t>
+            </a:r>
+            <a:r>
+              <a:rPr lang="zh-CN" altLang="en-US" sz="2400" b="1" dirty="0">
+                <a:solidFill>
+                  <a:srgbClr val="000066"/>
+                </a:solidFill>
+                <a:latin typeface="Microsoft JhengHei" panose="020B0604030504040204" pitchFamily="34" charset="-120"/>
+                <a:ea typeface="Microsoft JhengHei" panose="020B0604030504040204" pitchFamily="34" charset="-120"/>
+              </a:rPr>
+              <a:t>（</a:t>
+            </a:r>
+            <a:r>
+              <a:rPr lang="en-US" altLang="zh-CN" sz="2400" b="1" dirty="0">
+                <a:solidFill>
+                  <a:srgbClr val="000066"/>
+                </a:solidFill>
+                <a:latin typeface="Microsoft JhengHei" panose="020B0604030504040204" pitchFamily="34" charset="-120"/>
+                <a:ea typeface="Microsoft JhengHei" panose="020B0604030504040204" pitchFamily="34" charset="-120"/>
+              </a:rPr>
+              <a:t>2</a:t>
+            </a:r>
+            <a:r>
+              <a:rPr lang="zh-CN" altLang="en-US" sz="2400" b="1" dirty="0">
+                <a:solidFill>
+                  <a:srgbClr val="000066"/>
+                </a:solidFill>
+                <a:latin typeface="Microsoft JhengHei" panose="020B0604030504040204" pitchFamily="34" charset="-120"/>
+                <a:ea typeface="Microsoft JhengHei" panose="020B0604030504040204" pitchFamily="34" charset="-120"/>
+              </a:rPr>
+              <a:t>次）</a:t>
+            </a:r>
+            <a:endParaRPr lang="vi-VN" sz="2400" b="1" dirty="0">
+              <a:solidFill>
+                <a:srgbClr val="000066"/>
+              </a:solidFill>
+              <a:ea typeface="Microsoft JhengHei" panose="020B0604030504040204" pitchFamily="34" charset="-120"/>
+            </a:endParaRPr>
+          </a:p>
+        </p:txBody>
+      </p:sp>
+    </p:spTree>
+    <p:extLst>
+      <p:ext uri="{BB962C8B-B14F-4D97-AF65-F5344CB8AC3E}">
+        <p14:creationId xmlns:p14="http://schemas.microsoft.com/office/powerpoint/2010/main" val="3315644691"/>
       </p:ext>
     </p:extLst>
   </p:cSld>
